--- a/Smart Retail Analytics for Fashion Sales.pptx
+++ b/Smart Retail Analytics for Fashion Sales.pptx
@@ -6,24 +6,28 @@
   </p:sldMasterIdLst>
   <p:sldIdLst>
     <p:sldId id="256" r:id="rId2"/>
-    <p:sldId id="257" r:id="rId3"/>
-    <p:sldId id="259" r:id="rId4"/>
-    <p:sldId id="258" r:id="rId5"/>
-    <p:sldId id="260" r:id="rId6"/>
-    <p:sldId id="273" r:id="rId7"/>
-    <p:sldId id="261" r:id="rId8"/>
-    <p:sldId id="262" r:id="rId9"/>
-    <p:sldId id="264" r:id="rId10"/>
-    <p:sldId id="263" r:id="rId11"/>
-    <p:sldId id="265" r:id="rId12"/>
-    <p:sldId id="266" r:id="rId13"/>
-    <p:sldId id="267" r:id="rId14"/>
-    <p:sldId id="268" r:id="rId15"/>
-    <p:sldId id="269" r:id="rId16"/>
-    <p:sldId id="270" r:id="rId17"/>
-    <p:sldId id="271" r:id="rId18"/>
-    <p:sldId id="272" r:id="rId19"/>
-    <p:sldId id="274" r:id="rId20"/>
+    <p:sldId id="275" r:id="rId3"/>
+    <p:sldId id="257" r:id="rId4"/>
+    <p:sldId id="259" r:id="rId5"/>
+    <p:sldId id="258" r:id="rId6"/>
+    <p:sldId id="260" r:id="rId7"/>
+    <p:sldId id="273" r:id="rId8"/>
+    <p:sldId id="276" r:id="rId9"/>
+    <p:sldId id="277" r:id="rId10"/>
+    <p:sldId id="278" r:id="rId11"/>
+    <p:sldId id="261" r:id="rId12"/>
+    <p:sldId id="262" r:id="rId13"/>
+    <p:sldId id="264" r:id="rId14"/>
+    <p:sldId id="263" r:id="rId15"/>
+    <p:sldId id="265" r:id="rId16"/>
+    <p:sldId id="266" r:id="rId17"/>
+    <p:sldId id="267" r:id="rId18"/>
+    <p:sldId id="268" r:id="rId19"/>
+    <p:sldId id="269" r:id="rId20"/>
+    <p:sldId id="270" r:id="rId21"/>
+    <p:sldId id="271" r:id="rId22"/>
+    <p:sldId id="272" r:id="rId23"/>
+    <p:sldId id="274" r:id="rId24"/>
   </p:sldIdLst>
   <p:sldSz cx="12192000" cy="6858000"/>
   <p:notesSz cx="6858000" cy="9144000"/>
@@ -223,6 +227,13 @@
               <a:schemeClr val="lt1"/>
             </a:fontRef>
           </p:style>
+          <p:txBody>
+            <a:bodyPr/>
+            <a:lstStyle/>
+            <a:p>
+              <a:endParaRPr lang="en-IN"/>
+            </a:p>
+          </p:txBody>
         </p:sp>
         <p:cxnSp>
           <p:nvCxnSpPr>
@@ -360,6 +371,13 @@
               <a:schemeClr val="lt1"/>
             </a:fontRef>
           </p:style>
+          <p:txBody>
+            <a:bodyPr/>
+            <a:lstStyle/>
+            <a:p>
+              <a:endParaRPr lang="en-IN"/>
+            </a:p>
+          </p:txBody>
         </p:sp>
         <p:sp>
           <p:nvSpPr>
@@ -423,6 +441,13 @@
               <a:schemeClr val="lt1"/>
             </a:fontRef>
           </p:style>
+          <p:txBody>
+            <a:bodyPr/>
+            <a:lstStyle/>
+            <a:p>
+              <a:endParaRPr lang="en-IN"/>
+            </a:p>
+          </p:txBody>
         </p:sp>
         <p:sp>
           <p:nvSpPr>
@@ -465,6 +490,13 @@
               <a:schemeClr val="lt1"/>
             </a:fontRef>
           </p:style>
+          <p:txBody>
+            <a:bodyPr/>
+            <a:lstStyle/>
+            <a:p>
+              <a:endParaRPr lang="en-IN"/>
+            </a:p>
+          </p:txBody>
         </p:sp>
         <p:sp>
           <p:nvSpPr>
@@ -529,6 +561,13 @@
               <a:schemeClr val="lt1"/>
             </a:fontRef>
           </p:style>
+          <p:txBody>
+            <a:bodyPr/>
+            <a:lstStyle/>
+            <a:p>
+              <a:endParaRPr lang="en-IN"/>
+            </a:p>
+          </p:txBody>
         </p:sp>
         <p:sp>
           <p:nvSpPr>
@@ -592,6 +631,13 @@
               <a:schemeClr val="lt1"/>
             </a:fontRef>
           </p:style>
+          <p:txBody>
+            <a:bodyPr/>
+            <a:lstStyle/>
+            <a:p>
+              <a:endParaRPr lang="en-IN"/>
+            </a:p>
+          </p:txBody>
         </p:sp>
         <p:sp>
           <p:nvSpPr>
@@ -656,6 +702,13 @@
               <a:schemeClr val="lt1"/>
             </a:fontRef>
           </p:style>
+          <p:txBody>
+            <a:bodyPr/>
+            <a:lstStyle/>
+            <a:p>
+              <a:endParaRPr lang="en-IN"/>
+            </a:p>
+          </p:txBody>
         </p:sp>
         <p:sp>
           <p:nvSpPr>
@@ -698,6 +751,13 @@
               <a:schemeClr val="lt1"/>
             </a:fontRef>
           </p:style>
+          <p:txBody>
+            <a:bodyPr/>
+            <a:lstStyle/>
+            <a:p>
+              <a:endParaRPr lang="en-IN"/>
+            </a:p>
+          </p:txBody>
         </p:sp>
       </p:grpSp>
       <p:sp>
@@ -875,7 +935,7 @@
           <a:p>
             <a:fld id="{DF37364F-89AB-4B95-98E5-867F7745783F}" type="datetimeFigureOut">
               <a:rPr lang="en-IN" smtClean="0"/>
-              <a:t>30-01-2026</a:t>
+              <a:t>03-02-2026</a:t>
             </a:fld>
             <a:endParaRPr lang="en-IN"/>
           </a:p>
@@ -1126,7 +1186,7 @@
           <a:p>
             <a:fld id="{DF37364F-89AB-4B95-98E5-867F7745783F}" type="datetimeFigureOut">
               <a:rPr lang="en-IN" smtClean="0"/>
-              <a:t>30-01-2026</a:t>
+              <a:t>03-02-2026</a:t>
             </a:fld>
             <a:endParaRPr lang="en-IN"/>
           </a:p>
@@ -1440,7 +1500,7 @@
           <a:p>
             <a:fld id="{DF37364F-89AB-4B95-98E5-867F7745783F}" type="datetimeFigureOut">
               <a:rPr lang="en-IN" smtClean="0"/>
-              <a:t>30-01-2026</a:t>
+              <a:t>03-02-2026</a:t>
             </a:fld>
             <a:endParaRPr lang="en-IN"/>
           </a:p>
@@ -1773,7 +1833,7 @@
           <a:p>
             <a:fld id="{DF37364F-89AB-4B95-98E5-867F7745783F}" type="datetimeFigureOut">
               <a:rPr lang="en-IN" smtClean="0"/>
-              <a:t>30-01-2026</a:t>
+              <a:t>03-02-2026</a:t>
             </a:fld>
             <a:endParaRPr lang="en-IN"/>
           </a:p>
@@ -2087,7 +2147,7 @@
           <a:p>
             <a:fld id="{DF37364F-89AB-4B95-98E5-867F7745783F}" type="datetimeFigureOut">
               <a:rPr lang="en-IN" smtClean="0"/>
-              <a:t>30-01-2026</a:t>
+              <a:t>03-02-2026</a:t>
             </a:fld>
             <a:endParaRPr lang="en-IN"/>
           </a:p>
@@ -2480,7 +2540,7 @@
           <a:p>
             <a:fld id="{DF37364F-89AB-4B95-98E5-867F7745783F}" type="datetimeFigureOut">
               <a:rPr lang="en-IN" smtClean="0"/>
-              <a:t>30-01-2026</a:t>
+              <a:t>03-02-2026</a:t>
             </a:fld>
             <a:endParaRPr lang="en-IN"/>
           </a:p>
@@ -2650,7 +2710,7 @@
           <a:p>
             <a:fld id="{DF37364F-89AB-4B95-98E5-867F7745783F}" type="datetimeFigureOut">
               <a:rPr lang="en-IN" smtClean="0"/>
-              <a:t>30-01-2026</a:t>
+              <a:t>03-02-2026</a:t>
             </a:fld>
             <a:endParaRPr lang="en-IN"/>
           </a:p>
@@ -2830,7 +2890,7 @@
           <a:p>
             <a:fld id="{DF37364F-89AB-4B95-98E5-867F7745783F}" type="datetimeFigureOut">
               <a:rPr lang="en-IN" smtClean="0"/>
-              <a:t>30-01-2026</a:t>
+              <a:t>03-02-2026</a:t>
             </a:fld>
             <a:endParaRPr lang="en-IN"/>
           </a:p>
@@ -3000,7 +3060,7 @@
           <a:p>
             <a:fld id="{DF37364F-89AB-4B95-98E5-867F7745783F}" type="datetimeFigureOut">
               <a:rPr lang="en-IN" smtClean="0"/>
-              <a:t>30-01-2026</a:t>
+              <a:t>03-02-2026</a:t>
             </a:fld>
             <a:endParaRPr lang="en-IN"/>
           </a:p>
@@ -3247,7 +3307,7 @@
           <a:p>
             <a:fld id="{DF37364F-89AB-4B95-98E5-867F7745783F}" type="datetimeFigureOut">
               <a:rPr lang="en-IN" smtClean="0"/>
-              <a:t>30-01-2026</a:t>
+              <a:t>03-02-2026</a:t>
             </a:fld>
             <a:endParaRPr lang="en-IN"/>
           </a:p>
@@ -3479,7 +3539,7 @@
           <a:p>
             <a:fld id="{DF37364F-89AB-4B95-98E5-867F7745783F}" type="datetimeFigureOut">
               <a:rPr lang="en-IN" smtClean="0"/>
-              <a:t>30-01-2026</a:t>
+              <a:t>03-02-2026</a:t>
             </a:fld>
             <a:endParaRPr lang="en-IN"/>
           </a:p>
@@ -3853,7 +3913,7 @@
           <a:p>
             <a:fld id="{DF37364F-89AB-4B95-98E5-867F7745783F}" type="datetimeFigureOut">
               <a:rPr lang="en-IN" smtClean="0"/>
-              <a:t>30-01-2026</a:t>
+              <a:t>03-02-2026</a:t>
             </a:fld>
             <a:endParaRPr lang="en-IN"/>
           </a:p>
@@ -3976,7 +4036,7 @@
           <a:p>
             <a:fld id="{DF37364F-89AB-4B95-98E5-867F7745783F}" type="datetimeFigureOut">
               <a:rPr lang="en-IN" smtClean="0"/>
-              <a:t>30-01-2026</a:t>
+              <a:t>03-02-2026</a:t>
             </a:fld>
             <a:endParaRPr lang="en-IN"/>
           </a:p>
@@ -4071,7 +4131,7 @@
           <a:p>
             <a:fld id="{DF37364F-89AB-4B95-98E5-867F7745783F}" type="datetimeFigureOut">
               <a:rPr lang="en-IN" smtClean="0"/>
-              <a:t>30-01-2026</a:t>
+              <a:t>03-02-2026</a:t>
             </a:fld>
             <a:endParaRPr lang="en-IN"/>
           </a:p>
@@ -4326,7 +4386,7 @@
           <a:p>
             <a:fld id="{DF37364F-89AB-4B95-98E5-867F7745783F}" type="datetimeFigureOut">
               <a:rPr lang="en-IN" smtClean="0"/>
-              <a:t>30-01-2026</a:t>
+              <a:t>03-02-2026</a:t>
             </a:fld>
             <a:endParaRPr lang="en-IN"/>
           </a:p>
@@ -4631,7 +4691,7 @@
           <a:p>
             <a:fld id="{DF37364F-89AB-4B95-98E5-867F7745783F}" type="datetimeFigureOut">
               <a:rPr lang="en-IN" smtClean="0"/>
-              <a:t>30-01-2026</a:t>
+              <a:t>03-02-2026</a:t>
             </a:fld>
             <a:endParaRPr lang="en-IN"/>
           </a:p>
@@ -4822,6 +4882,13 @@
               <a:schemeClr val="lt1"/>
             </a:fontRef>
           </p:style>
+          <p:txBody>
+            <a:bodyPr/>
+            <a:lstStyle/>
+            <a:p>
+              <a:endParaRPr lang="en-IN"/>
+            </a:p>
+          </p:txBody>
         </p:sp>
         <p:sp>
           <p:nvSpPr>
@@ -4885,6 +4952,13 @@
               <a:schemeClr val="lt1"/>
             </a:fontRef>
           </p:style>
+          <p:txBody>
+            <a:bodyPr/>
+            <a:lstStyle/>
+            <a:p>
+              <a:endParaRPr lang="en-IN"/>
+            </a:p>
+          </p:txBody>
         </p:sp>
         <p:sp>
           <p:nvSpPr>
@@ -4927,6 +5001,13 @@
               <a:schemeClr val="lt1"/>
             </a:fontRef>
           </p:style>
+          <p:txBody>
+            <a:bodyPr/>
+            <a:lstStyle/>
+            <a:p>
+              <a:endParaRPr lang="en-IN"/>
+            </a:p>
+          </p:txBody>
         </p:sp>
         <p:sp>
           <p:nvSpPr>
@@ -4991,6 +5072,13 @@
               <a:schemeClr val="lt1"/>
             </a:fontRef>
           </p:style>
+          <p:txBody>
+            <a:bodyPr/>
+            <a:lstStyle/>
+            <a:p>
+              <a:endParaRPr lang="en-IN"/>
+            </a:p>
+          </p:txBody>
         </p:sp>
         <p:sp>
           <p:nvSpPr>
@@ -5054,6 +5142,13 @@
               <a:schemeClr val="lt1"/>
             </a:fontRef>
           </p:style>
+          <p:txBody>
+            <a:bodyPr/>
+            <a:lstStyle/>
+            <a:p>
+              <a:endParaRPr lang="en-IN"/>
+            </a:p>
+          </p:txBody>
         </p:sp>
         <p:sp>
           <p:nvSpPr>
@@ -5118,6 +5213,13 @@
               <a:schemeClr val="lt1"/>
             </a:fontRef>
           </p:style>
+          <p:txBody>
+            <a:bodyPr/>
+            <a:lstStyle/>
+            <a:p>
+              <a:endParaRPr lang="en-IN"/>
+            </a:p>
+          </p:txBody>
         </p:sp>
         <p:sp>
           <p:nvSpPr>
@@ -5160,6 +5262,13 @@
               <a:schemeClr val="lt1"/>
             </a:fontRef>
           </p:style>
+          <p:txBody>
+            <a:bodyPr/>
+            <a:lstStyle/>
+            <a:p>
+              <a:endParaRPr lang="en-IN"/>
+            </a:p>
+          </p:txBody>
         </p:sp>
         <p:sp>
           <p:nvSpPr>
@@ -5201,6 +5310,13 @@
               <a:schemeClr val="lt1"/>
             </a:fontRef>
           </p:style>
+          <p:txBody>
+            <a:bodyPr/>
+            <a:lstStyle/>
+            <a:p>
+              <a:endParaRPr lang="en-IN"/>
+            </a:p>
+          </p:txBody>
         </p:sp>
       </p:grpSp>
       <p:sp>
@@ -5333,7 +5449,7 @@
           <a:p>
             <a:fld id="{DF37364F-89AB-4B95-98E5-867F7745783F}" type="datetimeFigureOut">
               <a:rPr lang="en-IN" smtClean="0"/>
-              <a:t>30-01-2026</a:t>
+              <a:t>03-02-2026</a:t>
             </a:fld>
             <a:endParaRPr lang="en-IN"/>
           </a:p>
@@ -5918,8 +6034,8 @@
         </p:nvSpPr>
         <p:spPr>
           <a:xfrm>
-            <a:off x="5917915" y="5229546"/>
-            <a:ext cx="5198724" cy="400110"/>
+            <a:off x="5872047" y="4826775"/>
+            <a:ext cx="5198724" cy="707886"/>
           </a:xfrm>
           <a:prstGeom prst="rect">
             <a:avLst/>
@@ -5937,7 +6053,16 @@
                 <a:latin typeface="Times New Roman" panose="02020603050405020304" pitchFamily="18" charset="0"/>
                 <a:cs typeface="Times New Roman" panose="02020603050405020304" pitchFamily="18" charset="0"/>
               </a:rPr>
-              <a:t>HEMALA RAMESH BABU</a:t>
+              <a:t>Name : HEMALA R</a:t>
+            </a:r>
+          </a:p>
+          <a:p>
+            <a:r>
+              <a:rPr lang="en-US" sz="2000" b="1" dirty="0">
+                <a:latin typeface="Times New Roman" panose="02020603050405020304" pitchFamily="18" charset="0"/>
+                <a:cs typeface="Times New Roman" panose="02020603050405020304" pitchFamily="18" charset="0"/>
+              </a:rPr>
+              <a:t>Mentor : PANKAJ DOUNDEY</a:t>
             </a:r>
             <a:endParaRPr lang="en-IN" sz="2000" b="1" dirty="0">
               <a:latin typeface="Times New Roman" panose="02020603050405020304" pitchFamily="18" charset="0"/>
@@ -5960,6 +6085,731 @@
 </file>
 
 <file path=ppt/slides/slide10.xml><?xml version="1.0" encoding="utf-8"?>
+<p:sld xmlns:a="http://schemas.openxmlformats.org/drawingml/2006/main" xmlns:r="http://schemas.openxmlformats.org/officeDocument/2006/relationships" xmlns:p="http://schemas.openxmlformats.org/presentationml/2006/main">
+  <p:cSld>
+    <p:spTree>
+      <p:nvGrpSpPr>
+        <p:cNvPr id="1" name="">
+          <a:extLst>
+            <a:ext uri="{FF2B5EF4-FFF2-40B4-BE49-F238E27FC236}">
+              <a16:creationId xmlns:a16="http://schemas.microsoft.com/office/drawing/2014/main" id="{17655802-B797-3D78-8A52-38FD2BAEA318}"/>
+            </a:ext>
+          </a:extLst>
+        </p:cNvPr>
+        <p:cNvGrpSpPr/>
+        <p:nvPr/>
+      </p:nvGrpSpPr>
+      <p:grpSpPr>
+        <a:xfrm>
+          <a:off x="0" y="0"/>
+          <a:ext cx="0" cy="0"/>
+          <a:chOff x="0" y="0"/>
+          <a:chExt cx="0" cy="0"/>
+        </a:xfrm>
+      </p:grpSpPr>
+      <p:sp>
+        <p:nvSpPr>
+          <p:cNvPr id="2" name="Title 1">
+            <a:extLst>
+              <a:ext uri="{FF2B5EF4-FFF2-40B4-BE49-F238E27FC236}">
+                <a16:creationId xmlns:a16="http://schemas.microsoft.com/office/drawing/2014/main" id="{5F4174A9-6D33-43C7-050B-BB3F8DF48337}"/>
+              </a:ext>
+            </a:extLst>
+          </p:cNvPr>
+          <p:cNvSpPr>
+            <a:spLocks noGrp="1"/>
+          </p:cNvSpPr>
+          <p:nvPr>
+            <p:ph type="title"/>
+          </p:nvPr>
+        </p:nvSpPr>
+        <p:spPr>
+          <a:xfrm>
+            <a:off x="851995" y="301376"/>
+            <a:ext cx="8596668" cy="1320800"/>
+          </a:xfrm>
+        </p:spPr>
+        <p:txBody>
+          <a:bodyPr/>
+          <a:lstStyle/>
+          <a:p>
+            <a:pPr algn="ctr"/>
+            <a:r>
+              <a:rPr lang="en-US" b="1" dirty="0">
+                <a:solidFill>
+                  <a:schemeClr val="tx1"/>
+                </a:solidFill>
+                <a:latin typeface="Times New Roman" panose="02020603050405020304" pitchFamily="18" charset="0"/>
+                <a:cs typeface="Times New Roman" panose="02020603050405020304" pitchFamily="18" charset="0"/>
+              </a:rPr>
+              <a:t>                </a:t>
+            </a:r>
+            <a:endParaRPr lang="en-IN" b="1" dirty="0">
+              <a:solidFill>
+                <a:schemeClr val="tx1"/>
+              </a:solidFill>
+              <a:latin typeface="Times New Roman" panose="02020603050405020304" pitchFamily="18" charset="0"/>
+              <a:cs typeface="Times New Roman" panose="02020603050405020304" pitchFamily="18" charset="0"/>
+            </a:endParaRPr>
+          </a:p>
+        </p:txBody>
+      </p:sp>
+      <p:sp>
+        <p:nvSpPr>
+          <p:cNvPr id="4" name="TextBox 3">
+            <a:extLst>
+              <a:ext uri="{FF2B5EF4-FFF2-40B4-BE49-F238E27FC236}">
+                <a16:creationId xmlns:a16="http://schemas.microsoft.com/office/drawing/2014/main" id="{3B0DD306-A115-6630-11AE-A57010CF24AB}"/>
+              </a:ext>
+            </a:extLst>
+          </p:cNvPr>
+          <p:cNvSpPr txBox="1"/>
+          <p:nvPr/>
+        </p:nvSpPr>
+        <p:spPr>
+          <a:xfrm>
+            <a:off x="3311634" y="573817"/>
+            <a:ext cx="7222733" cy="523220"/>
+          </a:xfrm>
+          <a:prstGeom prst="rect">
+            <a:avLst/>
+          </a:prstGeom>
+          <a:noFill/>
+        </p:spPr>
+        <p:txBody>
+          <a:bodyPr wrap="square" rtlCol="0">
+            <a:spAutoFit/>
+          </a:bodyPr>
+          <a:lstStyle/>
+          <a:p>
+            <a:r>
+              <a:rPr lang="en-US" sz="2800" b="1" dirty="0">
+                <a:latin typeface="Times New Roman" panose="02020603050405020304" pitchFamily="18" charset="0"/>
+                <a:cs typeface="Times New Roman" panose="02020603050405020304" pitchFamily="18" charset="0"/>
+              </a:rPr>
+              <a:t>DIMENSIONS TABLES</a:t>
+            </a:r>
+            <a:endParaRPr lang="en-IN" sz="2800" b="1" dirty="0">
+              <a:latin typeface="Times New Roman" panose="02020603050405020304" pitchFamily="18" charset="0"/>
+              <a:cs typeface="Times New Roman" panose="02020603050405020304" pitchFamily="18" charset="0"/>
+            </a:endParaRPr>
+          </a:p>
+        </p:txBody>
+      </p:sp>
+      <p:pic>
+        <p:nvPicPr>
+          <p:cNvPr id="13" name="Picture 12">
+            <a:extLst>
+              <a:ext uri="{FF2B5EF4-FFF2-40B4-BE49-F238E27FC236}">
+                <a16:creationId xmlns:a16="http://schemas.microsoft.com/office/drawing/2014/main" id="{679E16D3-8AA7-21FD-77C2-F4D0E079497D}"/>
+              </a:ext>
+            </a:extLst>
+          </p:cNvPr>
+          <p:cNvPicPr>
+            <a:picLocks noChangeAspect="1"/>
+          </p:cNvPicPr>
+          <p:nvPr/>
+        </p:nvPicPr>
+        <p:blipFill>
+          <a:blip r:embed="rId2"/>
+          <a:stretch>
+            <a:fillRect/>
+          </a:stretch>
+        </p:blipFill>
+        <p:spPr>
+          <a:xfrm>
+            <a:off x="986603" y="1894617"/>
+            <a:ext cx="2569272" cy="3934374"/>
+          </a:xfrm>
+          <a:prstGeom prst="rect">
+            <a:avLst/>
+          </a:prstGeom>
+        </p:spPr>
+      </p:pic>
+      <p:pic>
+        <p:nvPicPr>
+          <p:cNvPr id="25" name="Picture 24">
+            <a:extLst>
+              <a:ext uri="{FF2B5EF4-FFF2-40B4-BE49-F238E27FC236}">
+                <a16:creationId xmlns:a16="http://schemas.microsoft.com/office/drawing/2014/main" id="{B2900A01-85DF-ADBA-0047-F806D750671E}"/>
+              </a:ext>
+            </a:extLst>
+          </p:cNvPr>
+          <p:cNvPicPr>
+            <a:picLocks noChangeAspect="1"/>
+          </p:cNvPicPr>
+          <p:nvPr/>
+        </p:nvPicPr>
+        <p:blipFill>
+          <a:blip r:embed="rId3"/>
+          <a:stretch>
+            <a:fillRect/>
+          </a:stretch>
+        </p:blipFill>
+        <p:spPr>
+          <a:xfrm>
+            <a:off x="4317967" y="1894617"/>
+            <a:ext cx="2437117" cy="3934374"/>
+          </a:xfrm>
+          <a:prstGeom prst="rect">
+            <a:avLst/>
+          </a:prstGeom>
+        </p:spPr>
+      </p:pic>
+      <p:pic>
+        <p:nvPicPr>
+          <p:cNvPr id="27" name="Picture 26">
+            <a:extLst>
+              <a:ext uri="{FF2B5EF4-FFF2-40B4-BE49-F238E27FC236}">
+                <a16:creationId xmlns:a16="http://schemas.microsoft.com/office/drawing/2014/main" id="{95D5AE92-DBE4-D93B-7467-4D382514BF0A}"/>
+              </a:ext>
+            </a:extLst>
+          </p:cNvPr>
+          <p:cNvPicPr>
+            <a:picLocks noChangeAspect="1"/>
+          </p:cNvPicPr>
+          <p:nvPr/>
+        </p:nvPicPr>
+        <p:blipFill>
+          <a:blip r:embed="rId4"/>
+          <a:stretch>
+            <a:fillRect/>
+          </a:stretch>
+        </p:blipFill>
+        <p:spPr>
+          <a:xfrm>
+            <a:off x="7517176" y="1894617"/>
+            <a:ext cx="3017191" cy="3858163"/>
+          </a:xfrm>
+          <a:prstGeom prst="rect">
+            <a:avLst/>
+          </a:prstGeom>
+        </p:spPr>
+      </p:pic>
+    </p:spTree>
+    <p:extLst>
+      <p:ext uri="{BB962C8B-B14F-4D97-AF65-F5344CB8AC3E}">
+        <p14:creationId xmlns:p14="http://schemas.microsoft.com/office/powerpoint/2010/main" val="502134410"/>
+      </p:ext>
+    </p:extLst>
+  </p:cSld>
+  <p:clrMapOvr>
+    <a:masterClrMapping/>
+  </p:clrMapOvr>
+</p:sld>
+</file>
+
+<file path=ppt/slides/slide11.xml><?xml version="1.0" encoding="utf-8"?>
+<p:sld xmlns:a="http://schemas.openxmlformats.org/drawingml/2006/main" xmlns:r="http://schemas.openxmlformats.org/officeDocument/2006/relationships" xmlns:p="http://schemas.openxmlformats.org/presentationml/2006/main">
+  <p:cSld>
+    <p:spTree>
+      <p:nvGrpSpPr>
+        <p:cNvPr id="1" name=""/>
+        <p:cNvGrpSpPr/>
+        <p:nvPr/>
+      </p:nvGrpSpPr>
+      <p:grpSpPr>
+        <a:xfrm>
+          <a:off x="0" y="0"/>
+          <a:ext cx="0" cy="0"/>
+          <a:chOff x="0" y="0"/>
+          <a:chExt cx="0" cy="0"/>
+        </a:xfrm>
+      </p:grpSpPr>
+      <p:sp>
+        <p:nvSpPr>
+          <p:cNvPr id="2" name="Title 1">
+            <a:extLst>
+              <a:ext uri="{FF2B5EF4-FFF2-40B4-BE49-F238E27FC236}">
+                <a16:creationId xmlns:a16="http://schemas.microsoft.com/office/drawing/2014/main" id="{81D0188B-2233-E74A-4751-1978C8796FC9}"/>
+              </a:ext>
+            </a:extLst>
+          </p:cNvPr>
+          <p:cNvSpPr>
+            <a:spLocks noGrp="1"/>
+          </p:cNvSpPr>
+          <p:nvPr>
+            <p:ph type="title"/>
+          </p:nvPr>
+        </p:nvSpPr>
+        <p:spPr>
+          <a:xfrm>
+            <a:off x="677334" y="609600"/>
+            <a:ext cx="9750936" cy="1320800"/>
+          </a:xfrm>
+        </p:spPr>
+        <p:txBody>
+          <a:bodyPr/>
+          <a:lstStyle/>
+          <a:p>
+            <a:r>
+              <a:rPr lang="en-US" b="1" dirty="0">
+                <a:solidFill>
+                  <a:schemeClr val="tx1"/>
+                </a:solidFill>
+                <a:latin typeface="Times New Roman" panose="02020603050405020304" pitchFamily="18" charset="0"/>
+                <a:cs typeface="Times New Roman" panose="02020603050405020304" pitchFamily="18" charset="0"/>
+              </a:rPr>
+              <a:t>                           Schema Modelling</a:t>
+            </a:r>
+            <a:endParaRPr lang="en-IN" b="1" dirty="0">
+              <a:solidFill>
+                <a:schemeClr val="tx1"/>
+              </a:solidFill>
+              <a:latin typeface="Times New Roman" panose="02020603050405020304" pitchFamily="18" charset="0"/>
+              <a:cs typeface="Times New Roman" panose="02020603050405020304" pitchFamily="18" charset="0"/>
+            </a:endParaRPr>
+          </a:p>
+        </p:txBody>
+      </p:sp>
+      <p:pic>
+        <p:nvPicPr>
+          <p:cNvPr id="7" name="Content Placeholder 6">
+            <a:extLst>
+              <a:ext uri="{FF2B5EF4-FFF2-40B4-BE49-F238E27FC236}">
+                <a16:creationId xmlns:a16="http://schemas.microsoft.com/office/drawing/2014/main" id="{D43F1264-A6C1-DB15-618C-361C30637F88}"/>
+              </a:ext>
+            </a:extLst>
+          </p:cNvPr>
+          <p:cNvPicPr>
+            <a:picLocks noGrp="1" noChangeAspect="1"/>
+          </p:cNvPicPr>
+          <p:nvPr>
+            <p:ph idx="1"/>
+          </p:nvPr>
+        </p:nvPicPr>
+        <p:blipFill>
+          <a:blip r:embed="rId2">
+            <a:extLst>
+              <a:ext uri="{28A0092B-C50C-407E-A947-70E740481C1C}">
+                <a14:useLocalDpi xmlns:a14="http://schemas.microsoft.com/office/drawing/2010/main" val="0"/>
+              </a:ext>
+            </a:extLst>
+          </a:blip>
+          <a:stretch>
+            <a:fillRect/>
+          </a:stretch>
+        </p:blipFill>
+        <p:spPr>
+          <a:xfrm>
+            <a:off x="1284270" y="1703703"/>
+            <a:ext cx="8712485" cy="4346789"/>
+          </a:xfrm>
+        </p:spPr>
+      </p:pic>
+    </p:spTree>
+    <p:extLst>
+      <p:ext uri="{BB962C8B-B14F-4D97-AF65-F5344CB8AC3E}">
+        <p14:creationId xmlns:p14="http://schemas.microsoft.com/office/powerpoint/2010/main" val="815895734"/>
+      </p:ext>
+    </p:extLst>
+  </p:cSld>
+  <p:clrMapOvr>
+    <a:masterClrMapping/>
+  </p:clrMapOvr>
+</p:sld>
+</file>
+
+<file path=ppt/slides/slide12.xml><?xml version="1.0" encoding="utf-8"?>
+<p:sld xmlns:a="http://schemas.openxmlformats.org/drawingml/2006/main" xmlns:r="http://schemas.openxmlformats.org/officeDocument/2006/relationships" xmlns:p="http://schemas.openxmlformats.org/presentationml/2006/main">
+  <p:cSld>
+    <p:spTree>
+      <p:nvGrpSpPr>
+        <p:cNvPr id="1" name=""/>
+        <p:cNvGrpSpPr/>
+        <p:nvPr/>
+      </p:nvGrpSpPr>
+      <p:grpSpPr>
+        <a:xfrm>
+          <a:off x="0" y="0"/>
+          <a:ext cx="0" cy="0"/>
+          <a:chOff x="0" y="0"/>
+          <a:chExt cx="0" cy="0"/>
+        </a:xfrm>
+      </p:grpSpPr>
+      <p:sp>
+        <p:nvSpPr>
+          <p:cNvPr id="2" name="Title 1">
+            <a:extLst>
+              <a:ext uri="{FF2B5EF4-FFF2-40B4-BE49-F238E27FC236}">
+                <a16:creationId xmlns:a16="http://schemas.microsoft.com/office/drawing/2014/main" id="{A31C3E90-41B9-0FD2-63B3-D34B0F9CCE51}"/>
+              </a:ext>
+            </a:extLst>
+          </p:cNvPr>
+          <p:cNvSpPr>
+            <a:spLocks noGrp="1"/>
+          </p:cNvSpPr>
+          <p:nvPr>
+            <p:ph type="title"/>
+          </p:nvPr>
+        </p:nvSpPr>
+        <p:spPr>
+          <a:xfrm>
+            <a:off x="851995" y="301376"/>
+            <a:ext cx="8596668" cy="1320800"/>
+          </a:xfrm>
+        </p:spPr>
+        <p:txBody>
+          <a:bodyPr/>
+          <a:lstStyle/>
+          <a:p>
+            <a:pPr algn="ctr"/>
+            <a:r>
+              <a:rPr lang="en-US" b="1" dirty="0">
+                <a:solidFill>
+                  <a:schemeClr val="tx1"/>
+                </a:solidFill>
+                <a:latin typeface="Times New Roman" panose="02020603050405020304" pitchFamily="18" charset="0"/>
+                <a:cs typeface="Times New Roman" panose="02020603050405020304" pitchFamily="18" charset="0"/>
+              </a:rPr>
+              <a:t>                Key Performance Indicators</a:t>
+            </a:r>
+            <a:endParaRPr lang="en-IN" b="1" dirty="0">
+              <a:solidFill>
+                <a:schemeClr val="tx1"/>
+              </a:solidFill>
+              <a:latin typeface="Times New Roman" panose="02020603050405020304" pitchFamily="18" charset="0"/>
+              <a:cs typeface="Times New Roman" panose="02020603050405020304" pitchFamily="18" charset="0"/>
+            </a:endParaRPr>
+          </a:p>
+        </p:txBody>
+      </p:sp>
+      <p:sp>
+        <p:nvSpPr>
+          <p:cNvPr id="3" name="Content Placeholder 2">
+            <a:extLst>
+              <a:ext uri="{FF2B5EF4-FFF2-40B4-BE49-F238E27FC236}">
+                <a16:creationId xmlns:a16="http://schemas.microsoft.com/office/drawing/2014/main" id="{C7372B3C-1407-FB62-0BC0-C2F0B0D6BF5E}"/>
+              </a:ext>
+            </a:extLst>
+          </p:cNvPr>
+          <p:cNvSpPr>
+            <a:spLocks noGrp="1"/>
+          </p:cNvSpPr>
+          <p:nvPr>
+            <p:ph idx="1"/>
+          </p:nvPr>
+        </p:nvSpPr>
+        <p:spPr>
+          <a:xfrm>
+            <a:off x="1089061" y="1369478"/>
+            <a:ext cx="10531011" cy="4743646"/>
+          </a:xfrm>
+        </p:spPr>
+        <p:txBody>
+          <a:bodyPr>
+            <a:normAutofit/>
+          </a:bodyPr>
+          <a:lstStyle/>
+          <a:p>
+            <a:pPr marL="0" indent="0">
+              <a:buNone/>
+            </a:pPr>
+            <a:r>
+              <a:rPr lang="en-US" sz="3000" b="1" dirty="0">
+                <a:latin typeface="Times New Roman" panose="02020603050405020304" pitchFamily="18" charset="0"/>
+                <a:cs typeface="Times New Roman" panose="02020603050405020304" pitchFamily="18" charset="0"/>
+              </a:rPr>
+              <a:t>Positive KPIs</a:t>
+            </a:r>
+          </a:p>
+          <a:p>
+            <a:pPr>
+              <a:buClr>
+                <a:schemeClr val="tx1">
+                  <a:lumMod val="95000"/>
+                  <a:lumOff val="5000"/>
+                </a:schemeClr>
+              </a:buClr>
+              <a:buFont typeface="Wingdings" panose="05000000000000000000" pitchFamily="2" charset="2"/>
+              <a:buChar char="Ø"/>
+            </a:pPr>
+            <a:r>
+              <a:rPr lang="en-IN" sz="2600" b="1" dirty="0">
+                <a:latin typeface="Times New Roman" panose="02020603050405020304" pitchFamily="18" charset="0"/>
+                <a:cs typeface="Times New Roman" panose="02020603050405020304" pitchFamily="18" charset="0"/>
+              </a:rPr>
+              <a:t>Total Revenue</a:t>
+            </a:r>
+          </a:p>
+          <a:p>
+            <a:pPr>
+              <a:buClr>
+                <a:schemeClr val="tx1">
+                  <a:lumMod val="95000"/>
+                  <a:lumOff val="5000"/>
+                </a:schemeClr>
+              </a:buClr>
+              <a:buFont typeface="Wingdings" panose="05000000000000000000" pitchFamily="2" charset="2"/>
+              <a:buChar char="Ø"/>
+            </a:pPr>
+            <a:r>
+              <a:rPr lang="en-IN" sz="2600" b="1" dirty="0">
+                <a:latin typeface="Times New Roman" panose="02020603050405020304" pitchFamily="18" charset="0"/>
+                <a:cs typeface="Times New Roman" panose="02020603050405020304" pitchFamily="18" charset="0"/>
+              </a:rPr>
+              <a:t>Branch-wise revenue share</a:t>
+            </a:r>
+          </a:p>
+          <a:p>
+            <a:pPr>
+              <a:buClr>
+                <a:schemeClr val="tx1">
+                  <a:lumMod val="95000"/>
+                  <a:lumOff val="5000"/>
+                </a:schemeClr>
+              </a:buClr>
+              <a:buFont typeface="Wingdings" panose="05000000000000000000" pitchFamily="2" charset="2"/>
+              <a:buChar char="Ø"/>
+            </a:pPr>
+            <a:r>
+              <a:rPr lang="en-IN" sz="2600" b="1" dirty="0">
+                <a:latin typeface="Times New Roman" panose="02020603050405020304" pitchFamily="18" charset="0"/>
+                <a:cs typeface="Times New Roman" panose="02020603050405020304" pitchFamily="18" charset="0"/>
+              </a:rPr>
+              <a:t>Employee Sales per Head</a:t>
+            </a:r>
+          </a:p>
+          <a:p>
+            <a:pPr marL="0" indent="0">
+              <a:buNone/>
+            </a:pPr>
+            <a:endParaRPr lang="en-IN" b="1" dirty="0">
+              <a:latin typeface="Times New Roman" panose="02020603050405020304" pitchFamily="18" charset="0"/>
+              <a:cs typeface="Times New Roman" panose="02020603050405020304" pitchFamily="18" charset="0"/>
+            </a:endParaRPr>
+          </a:p>
+          <a:p>
+            <a:pPr marL="0" indent="0">
+              <a:buNone/>
+            </a:pPr>
+            <a:r>
+              <a:rPr lang="en-IN" sz="3000" b="1" dirty="0">
+                <a:latin typeface="Times New Roman" panose="02020603050405020304" pitchFamily="18" charset="0"/>
+                <a:cs typeface="Times New Roman" panose="02020603050405020304" pitchFamily="18" charset="0"/>
+              </a:rPr>
+              <a:t>Negative KPIs</a:t>
+            </a:r>
+          </a:p>
+          <a:p>
+            <a:pPr>
+              <a:buClrTx/>
+              <a:buFont typeface="Wingdings" panose="05000000000000000000" pitchFamily="2" charset="2"/>
+              <a:buChar char="Ø"/>
+            </a:pPr>
+            <a:r>
+              <a:rPr lang="en-IN" sz="2600" b="1" dirty="0">
+                <a:latin typeface="Times New Roman" panose="02020603050405020304" pitchFamily="18" charset="0"/>
+                <a:cs typeface="Times New Roman" panose="02020603050405020304" pitchFamily="18" charset="0"/>
+              </a:rPr>
+              <a:t>Stockouts</a:t>
+            </a:r>
+          </a:p>
+          <a:p>
+            <a:pPr>
+              <a:buClrTx/>
+              <a:buFont typeface="Wingdings" panose="05000000000000000000" pitchFamily="2" charset="2"/>
+              <a:buChar char="Ø"/>
+            </a:pPr>
+            <a:r>
+              <a:rPr lang="en-IN" sz="2600" b="1" dirty="0">
+                <a:latin typeface="Times New Roman" panose="02020603050405020304" pitchFamily="18" charset="0"/>
+                <a:cs typeface="Times New Roman" panose="02020603050405020304" pitchFamily="18" charset="0"/>
+              </a:rPr>
+              <a:t>Discount Leakage</a:t>
+            </a:r>
+          </a:p>
+          <a:p>
+            <a:pPr>
+              <a:buClrTx/>
+              <a:buFont typeface="Wingdings" panose="05000000000000000000" pitchFamily="2" charset="2"/>
+              <a:buChar char="Ø"/>
+            </a:pPr>
+            <a:r>
+              <a:rPr lang="en-IN" sz="2600" b="1" dirty="0">
+                <a:latin typeface="Times New Roman" panose="02020603050405020304" pitchFamily="18" charset="0"/>
+                <a:cs typeface="Times New Roman" panose="02020603050405020304" pitchFamily="18" charset="0"/>
+              </a:rPr>
+              <a:t>Customer Churn</a:t>
+            </a:r>
+            <a:endParaRPr lang="en-IN" sz="2600" dirty="0">
+              <a:latin typeface="Times New Roman" panose="02020603050405020304" pitchFamily="18" charset="0"/>
+              <a:cs typeface="Times New Roman" panose="02020603050405020304" pitchFamily="18" charset="0"/>
+            </a:endParaRPr>
+          </a:p>
+        </p:txBody>
+      </p:sp>
+    </p:spTree>
+    <p:extLst>
+      <p:ext uri="{BB962C8B-B14F-4D97-AF65-F5344CB8AC3E}">
+        <p14:creationId xmlns:p14="http://schemas.microsoft.com/office/powerpoint/2010/main" val="2413077751"/>
+      </p:ext>
+    </p:extLst>
+  </p:cSld>
+  <p:clrMapOvr>
+    <a:masterClrMapping/>
+  </p:clrMapOvr>
+</p:sld>
+</file>
+
+<file path=ppt/slides/slide13.xml><?xml version="1.0" encoding="utf-8"?>
+<p:sld xmlns:a="http://schemas.openxmlformats.org/drawingml/2006/main" xmlns:r="http://schemas.openxmlformats.org/officeDocument/2006/relationships" xmlns:p="http://schemas.openxmlformats.org/presentationml/2006/main">
+  <p:cSld>
+    <p:spTree>
+      <p:nvGrpSpPr>
+        <p:cNvPr id="1" name="">
+          <a:extLst>
+            <a:ext uri="{FF2B5EF4-FFF2-40B4-BE49-F238E27FC236}">
+              <a16:creationId xmlns:a16="http://schemas.microsoft.com/office/drawing/2014/main" id="{CD6D0018-499B-5431-D927-CADADA02EA4C}"/>
+            </a:ext>
+          </a:extLst>
+        </p:cNvPr>
+        <p:cNvGrpSpPr/>
+        <p:nvPr/>
+      </p:nvGrpSpPr>
+      <p:grpSpPr>
+        <a:xfrm>
+          <a:off x="0" y="0"/>
+          <a:ext cx="0" cy="0"/>
+          <a:chOff x="0" y="0"/>
+          <a:chExt cx="0" cy="0"/>
+        </a:xfrm>
+      </p:grpSpPr>
+      <p:sp>
+        <p:nvSpPr>
+          <p:cNvPr id="2" name="Title 1">
+            <a:extLst>
+              <a:ext uri="{FF2B5EF4-FFF2-40B4-BE49-F238E27FC236}">
+                <a16:creationId xmlns:a16="http://schemas.microsoft.com/office/drawing/2014/main" id="{22D36BC8-B096-74EB-C4B5-C01FF5B01823}"/>
+              </a:ext>
+            </a:extLst>
+          </p:cNvPr>
+          <p:cNvSpPr>
+            <a:spLocks noGrp="1"/>
+          </p:cNvSpPr>
+          <p:nvPr>
+            <p:ph type="title"/>
+          </p:nvPr>
+        </p:nvSpPr>
+        <p:spPr/>
+        <p:txBody>
+          <a:bodyPr/>
+          <a:lstStyle/>
+          <a:p>
+            <a:pPr algn="just"/>
+            <a:r>
+              <a:rPr lang="en-US" b="1" dirty="0">
+                <a:solidFill>
+                  <a:schemeClr val="tx1"/>
+                </a:solidFill>
+                <a:latin typeface="Times New Roman" panose="02020603050405020304" pitchFamily="18" charset="0"/>
+                <a:cs typeface="Times New Roman" panose="02020603050405020304" pitchFamily="18" charset="0"/>
+              </a:rPr>
+              <a:t>                                 Dataset</a:t>
+            </a:r>
+            <a:endParaRPr lang="en-IN" b="1" dirty="0">
+              <a:solidFill>
+                <a:schemeClr val="tx1"/>
+              </a:solidFill>
+              <a:latin typeface="Times New Roman" panose="02020603050405020304" pitchFamily="18" charset="0"/>
+              <a:cs typeface="Times New Roman" panose="02020603050405020304" pitchFamily="18" charset="0"/>
+            </a:endParaRPr>
+          </a:p>
+        </p:txBody>
+      </p:sp>
+      <p:sp>
+        <p:nvSpPr>
+          <p:cNvPr id="6" name="TextBox 5">
+            <a:extLst>
+              <a:ext uri="{FF2B5EF4-FFF2-40B4-BE49-F238E27FC236}">
+                <a16:creationId xmlns:a16="http://schemas.microsoft.com/office/drawing/2014/main" id="{F928174C-08FE-ED97-440F-132E446C8BFC}"/>
+              </a:ext>
+            </a:extLst>
+          </p:cNvPr>
+          <p:cNvSpPr txBox="1"/>
+          <p:nvPr/>
+        </p:nvSpPr>
+        <p:spPr>
+          <a:xfrm>
+            <a:off x="3386667" y="1464733"/>
+            <a:ext cx="3716866" cy="400110"/>
+          </a:xfrm>
+          <a:prstGeom prst="rect">
+            <a:avLst/>
+          </a:prstGeom>
+          <a:noFill/>
+        </p:spPr>
+        <p:txBody>
+          <a:bodyPr wrap="square" rtlCol="0">
+            <a:spAutoFit/>
+          </a:bodyPr>
+          <a:lstStyle/>
+          <a:p>
+            <a:r>
+              <a:rPr lang="en-US" sz="2000" dirty="0">
+                <a:latin typeface="Times New Roman" panose="02020603050405020304" pitchFamily="18" charset="0"/>
+                <a:cs typeface="Times New Roman" panose="02020603050405020304" pitchFamily="18" charset="0"/>
+              </a:rPr>
+              <a:t>                 </a:t>
+            </a:r>
+            <a:r>
+              <a:rPr lang="en-US" sz="2000" dirty="0" err="1">
+                <a:latin typeface="Times New Roman" panose="02020603050405020304" pitchFamily="18" charset="0"/>
+                <a:cs typeface="Times New Roman" panose="02020603050405020304" pitchFamily="18" charset="0"/>
+              </a:rPr>
+              <a:t>Fact_Sales</a:t>
+            </a:r>
+            <a:endParaRPr lang="en-IN" sz="2000" dirty="0">
+              <a:latin typeface="Times New Roman" panose="02020603050405020304" pitchFamily="18" charset="0"/>
+              <a:cs typeface="Times New Roman" panose="02020603050405020304" pitchFamily="18" charset="0"/>
+            </a:endParaRPr>
+          </a:p>
+        </p:txBody>
+      </p:sp>
+      <p:pic>
+        <p:nvPicPr>
+          <p:cNvPr id="9" name="Picture 8">
+            <a:extLst>
+              <a:ext uri="{FF2B5EF4-FFF2-40B4-BE49-F238E27FC236}">
+                <a16:creationId xmlns:a16="http://schemas.microsoft.com/office/drawing/2014/main" id="{1B7C9183-CC52-7A87-9A28-B05217F0A0F5}"/>
+              </a:ext>
+            </a:extLst>
+          </p:cNvPr>
+          <p:cNvPicPr>
+            <a:picLocks noChangeAspect="1"/>
+          </p:cNvPicPr>
+          <p:nvPr/>
+        </p:nvPicPr>
+        <p:blipFill>
+          <a:blip r:embed="rId2"/>
+          <a:stretch>
+            <a:fillRect/>
+          </a:stretch>
+        </p:blipFill>
+        <p:spPr>
+          <a:xfrm>
+            <a:off x="1058237" y="2234063"/>
+            <a:ext cx="9623461" cy="3499482"/>
+          </a:xfrm>
+          <a:prstGeom prst="rect">
+            <a:avLst/>
+          </a:prstGeom>
+        </p:spPr>
+      </p:pic>
+    </p:spTree>
+    <p:extLst>
+      <p:ext uri="{BB962C8B-B14F-4D97-AF65-F5344CB8AC3E}">
+        <p14:creationId xmlns:p14="http://schemas.microsoft.com/office/powerpoint/2010/main" val="2544861665"/>
+      </p:ext>
+    </p:extLst>
+  </p:cSld>
+  <p:clrMapOvr>
+    <a:masterClrMapping/>
+  </p:clrMapOvr>
+</p:sld>
+</file>
+
+<file path=ppt/slides/slide14.xml><?xml version="1.0" encoding="utf-8"?>
 <p:sld xmlns:a="http://schemas.openxmlformats.org/drawingml/2006/main" xmlns:r="http://schemas.openxmlformats.org/officeDocument/2006/relationships" xmlns:p="http://schemas.openxmlformats.org/presentationml/2006/main">
   <p:cSld>
     <p:spTree>
@@ -6146,7 +6996,7 @@
 </p:sld>
 </file>
 
-<file path=ppt/slides/slide11.xml><?xml version="1.0" encoding="utf-8"?>
+<file path=ppt/slides/slide15.xml><?xml version="1.0" encoding="utf-8"?>
 <p:sld xmlns:a="http://schemas.openxmlformats.org/drawingml/2006/main" xmlns:r="http://schemas.openxmlformats.org/officeDocument/2006/relationships" xmlns:p="http://schemas.openxmlformats.org/presentationml/2006/main">
   <p:cSld>
     <p:spTree>
@@ -6310,7 +7160,7 @@
 </p:sld>
 </file>
 
-<file path=ppt/slides/slide12.xml><?xml version="1.0" encoding="utf-8"?>
+<file path=ppt/slides/slide16.xml><?xml version="1.0" encoding="utf-8"?>
 <p:sld xmlns:a="http://schemas.openxmlformats.org/drawingml/2006/main" xmlns:r="http://schemas.openxmlformats.org/officeDocument/2006/relationships" xmlns:p="http://schemas.openxmlformats.org/presentationml/2006/main">
   <p:cSld>
     <p:spTree>
@@ -6474,7 +7324,7 @@
 </p:sld>
 </file>
 
-<file path=ppt/slides/slide13.xml><?xml version="1.0" encoding="utf-8"?>
+<file path=ppt/slides/slide17.xml><?xml version="1.0" encoding="utf-8"?>
 <p:sld xmlns:a="http://schemas.openxmlformats.org/drawingml/2006/main" xmlns:r="http://schemas.openxmlformats.org/officeDocument/2006/relationships" xmlns:p="http://schemas.openxmlformats.org/presentationml/2006/main">
   <p:cSld>
     <p:spTree>
@@ -6639,7 +7489,7 @@
 </p:sld>
 </file>
 
-<file path=ppt/slides/slide14.xml><?xml version="1.0" encoding="utf-8"?>
+<file path=ppt/slides/slide18.xml><?xml version="1.0" encoding="utf-8"?>
 <p:sld xmlns:a="http://schemas.openxmlformats.org/drawingml/2006/main" xmlns:r="http://schemas.openxmlformats.org/officeDocument/2006/relationships" xmlns:p="http://schemas.openxmlformats.org/presentationml/2006/main">
   <p:cSld>
     <p:spTree>
@@ -6802,7 +7652,7 @@
 </p:sld>
 </file>
 
-<file path=ppt/slides/slide15.xml><?xml version="1.0" encoding="utf-8"?>
+<file path=ppt/slides/slide19.xml><?xml version="1.0" encoding="utf-8"?>
 <p:sld xmlns:a="http://schemas.openxmlformats.org/drawingml/2006/main" xmlns:r="http://schemas.openxmlformats.org/officeDocument/2006/relationships" xmlns:p="http://schemas.openxmlformats.org/presentationml/2006/main">
   <p:cSld>
     <p:spTree>
@@ -6958,604 +7808,6 @@
     <p:extLst>
       <p:ext uri="{BB962C8B-B14F-4D97-AF65-F5344CB8AC3E}">
         <p14:creationId xmlns:p14="http://schemas.microsoft.com/office/powerpoint/2010/main" val="2589104028"/>
-      </p:ext>
-    </p:extLst>
-  </p:cSld>
-  <p:clrMapOvr>
-    <a:masterClrMapping/>
-  </p:clrMapOvr>
-</p:sld>
-</file>
-
-<file path=ppt/slides/slide16.xml><?xml version="1.0" encoding="utf-8"?>
-<p:sld xmlns:a="http://schemas.openxmlformats.org/drawingml/2006/main" xmlns:r="http://schemas.openxmlformats.org/officeDocument/2006/relationships" xmlns:p="http://schemas.openxmlformats.org/presentationml/2006/main">
-  <p:cSld>
-    <p:spTree>
-      <p:nvGrpSpPr>
-        <p:cNvPr id="1" name="">
-          <a:extLst>
-            <a:ext uri="{FF2B5EF4-FFF2-40B4-BE49-F238E27FC236}">
-              <a16:creationId xmlns:a16="http://schemas.microsoft.com/office/drawing/2014/main" id="{377E9DE7-5D00-5C0E-0341-F9FD7B7A13EE}"/>
-            </a:ext>
-          </a:extLst>
-        </p:cNvPr>
-        <p:cNvGrpSpPr/>
-        <p:nvPr/>
-      </p:nvGrpSpPr>
-      <p:grpSpPr>
-        <a:xfrm>
-          <a:off x="0" y="0"/>
-          <a:ext cx="0" cy="0"/>
-          <a:chOff x="0" y="0"/>
-          <a:chExt cx="0" cy="0"/>
-        </a:xfrm>
-      </p:grpSpPr>
-      <p:sp>
-        <p:nvSpPr>
-          <p:cNvPr id="2" name="Title 1">
-            <a:extLst>
-              <a:ext uri="{FF2B5EF4-FFF2-40B4-BE49-F238E27FC236}">
-                <a16:creationId xmlns:a16="http://schemas.microsoft.com/office/drawing/2014/main" id="{FCE510CE-FD49-B9A3-0DDE-EB04BA8BD981}"/>
-              </a:ext>
-            </a:extLst>
-          </p:cNvPr>
-          <p:cNvSpPr>
-            <a:spLocks noGrp="1"/>
-          </p:cNvSpPr>
-          <p:nvPr>
-            <p:ph type="title"/>
-          </p:nvPr>
-        </p:nvSpPr>
-        <p:spPr/>
-        <p:txBody>
-          <a:bodyPr/>
-          <a:lstStyle/>
-          <a:p>
-            <a:r>
-              <a:rPr lang="en-US" b="1" dirty="0">
-                <a:solidFill>
-                  <a:schemeClr val="tx1"/>
-                </a:solidFill>
-                <a:latin typeface="Times New Roman" panose="02020603050405020304" pitchFamily="18" charset="0"/>
-                <a:cs typeface="Times New Roman" panose="02020603050405020304" pitchFamily="18" charset="0"/>
-              </a:rPr>
-              <a:t>                              Dataset</a:t>
-            </a:r>
-            <a:endParaRPr lang="en-IN" b="1" dirty="0">
-              <a:solidFill>
-                <a:schemeClr val="tx1"/>
-              </a:solidFill>
-              <a:latin typeface="Times New Roman" panose="02020603050405020304" pitchFamily="18" charset="0"/>
-              <a:cs typeface="Times New Roman" panose="02020603050405020304" pitchFamily="18" charset="0"/>
-            </a:endParaRPr>
-          </a:p>
-        </p:txBody>
-      </p:sp>
-      <p:sp>
-        <p:nvSpPr>
-          <p:cNvPr id="6" name="TextBox 5">
-            <a:extLst>
-              <a:ext uri="{FF2B5EF4-FFF2-40B4-BE49-F238E27FC236}">
-                <a16:creationId xmlns:a16="http://schemas.microsoft.com/office/drawing/2014/main" id="{768EF2E5-D081-08EB-A255-AB101520C29D}"/>
-              </a:ext>
-            </a:extLst>
-          </p:cNvPr>
-          <p:cNvSpPr txBox="1"/>
-          <p:nvPr/>
-        </p:nvSpPr>
-        <p:spPr>
-          <a:xfrm>
-            <a:off x="3386667" y="1464733"/>
-            <a:ext cx="3716866" cy="400110"/>
-          </a:xfrm>
-          <a:prstGeom prst="rect">
-            <a:avLst/>
-          </a:prstGeom>
-          <a:noFill/>
-        </p:spPr>
-        <p:txBody>
-          <a:bodyPr wrap="square" rtlCol="0">
-            <a:spAutoFit/>
-          </a:bodyPr>
-          <a:lstStyle/>
-          <a:p>
-            <a:r>
-              <a:rPr lang="en-US" sz="2000" dirty="0">
-                <a:latin typeface="Times New Roman" panose="02020603050405020304" pitchFamily="18" charset="0"/>
-                <a:cs typeface="Times New Roman" panose="02020603050405020304" pitchFamily="18" charset="0"/>
-              </a:rPr>
-              <a:t>         </a:t>
-            </a:r>
-            <a:r>
-              <a:rPr lang="en-US" sz="2000" dirty="0" err="1">
-                <a:latin typeface="Times New Roman" panose="02020603050405020304" pitchFamily="18" charset="0"/>
-                <a:cs typeface="Times New Roman" panose="02020603050405020304" pitchFamily="18" charset="0"/>
-              </a:rPr>
-              <a:t>Dim_Branch</a:t>
-            </a:r>
-            <a:r>
-              <a:rPr lang="en-US" sz="2000" dirty="0">
-                <a:latin typeface="Times New Roman" panose="02020603050405020304" pitchFamily="18" charset="0"/>
-                <a:cs typeface="Times New Roman" panose="02020603050405020304" pitchFamily="18" charset="0"/>
-              </a:rPr>
-              <a:t> Table</a:t>
-            </a:r>
-            <a:endParaRPr lang="en-IN" sz="2000" dirty="0">
-              <a:latin typeface="Times New Roman" panose="02020603050405020304" pitchFamily="18" charset="0"/>
-              <a:cs typeface="Times New Roman" panose="02020603050405020304" pitchFamily="18" charset="0"/>
-            </a:endParaRPr>
-          </a:p>
-        </p:txBody>
-      </p:sp>
-      <p:pic>
-        <p:nvPicPr>
-          <p:cNvPr id="7" name="Content Placeholder 6">
-            <a:extLst>
-              <a:ext uri="{FF2B5EF4-FFF2-40B4-BE49-F238E27FC236}">
-                <a16:creationId xmlns:a16="http://schemas.microsoft.com/office/drawing/2014/main" id="{1E9AA8C6-D4BF-E4E6-6213-399413A409D9}"/>
-              </a:ext>
-            </a:extLst>
-          </p:cNvPr>
-          <p:cNvPicPr>
-            <a:picLocks noGrp="1" noChangeAspect="1"/>
-          </p:cNvPicPr>
-          <p:nvPr>
-            <p:ph idx="1"/>
-          </p:nvPr>
-        </p:nvPicPr>
-        <p:blipFill>
-          <a:blip r:embed="rId2"/>
-          <a:stretch>
-            <a:fillRect/>
-          </a:stretch>
-        </p:blipFill>
-        <p:spPr>
-          <a:xfrm>
-            <a:off x="1499796" y="2494165"/>
-            <a:ext cx="8596312" cy="2016190"/>
-          </a:xfrm>
-          <a:prstGeom prst="rect">
-            <a:avLst/>
-          </a:prstGeom>
-        </p:spPr>
-      </p:pic>
-    </p:spTree>
-    <p:extLst>
-      <p:ext uri="{BB962C8B-B14F-4D97-AF65-F5344CB8AC3E}">
-        <p14:creationId xmlns:p14="http://schemas.microsoft.com/office/powerpoint/2010/main" val="4190939066"/>
-      </p:ext>
-    </p:extLst>
-  </p:cSld>
-  <p:clrMapOvr>
-    <a:masterClrMapping/>
-  </p:clrMapOvr>
-</p:sld>
-</file>
-
-<file path=ppt/slides/slide17.xml><?xml version="1.0" encoding="utf-8"?>
-<p:sld xmlns:a="http://schemas.openxmlformats.org/drawingml/2006/main" xmlns:r="http://schemas.openxmlformats.org/officeDocument/2006/relationships" xmlns:p="http://schemas.openxmlformats.org/presentationml/2006/main">
-  <p:cSld>
-    <p:spTree>
-      <p:nvGrpSpPr>
-        <p:cNvPr id="1" name="">
-          <a:extLst>
-            <a:ext uri="{FF2B5EF4-FFF2-40B4-BE49-F238E27FC236}">
-              <a16:creationId xmlns:a16="http://schemas.microsoft.com/office/drawing/2014/main" id="{CD76A32B-AA68-682C-AEA7-913B1C001A3D}"/>
-            </a:ext>
-          </a:extLst>
-        </p:cNvPr>
-        <p:cNvGrpSpPr/>
-        <p:nvPr/>
-      </p:nvGrpSpPr>
-      <p:grpSpPr>
-        <a:xfrm>
-          <a:off x="0" y="0"/>
-          <a:ext cx="0" cy="0"/>
-          <a:chOff x="0" y="0"/>
-          <a:chExt cx="0" cy="0"/>
-        </a:xfrm>
-      </p:grpSpPr>
-      <p:sp>
-        <p:nvSpPr>
-          <p:cNvPr id="2" name="Title 1">
-            <a:extLst>
-              <a:ext uri="{FF2B5EF4-FFF2-40B4-BE49-F238E27FC236}">
-                <a16:creationId xmlns:a16="http://schemas.microsoft.com/office/drawing/2014/main" id="{63966F0F-92BF-54B6-9EF3-A700D40A30D3}"/>
-              </a:ext>
-            </a:extLst>
-          </p:cNvPr>
-          <p:cNvSpPr>
-            <a:spLocks noGrp="1"/>
-          </p:cNvSpPr>
-          <p:nvPr>
-            <p:ph type="title"/>
-          </p:nvPr>
-        </p:nvSpPr>
-        <p:spPr/>
-        <p:txBody>
-          <a:bodyPr/>
-          <a:lstStyle/>
-          <a:p>
-            <a:r>
-              <a:rPr lang="en-US" b="1" dirty="0">
-                <a:solidFill>
-                  <a:schemeClr val="tx1"/>
-                </a:solidFill>
-                <a:latin typeface="Times New Roman" panose="02020603050405020304" pitchFamily="18" charset="0"/>
-                <a:cs typeface="Times New Roman" panose="02020603050405020304" pitchFamily="18" charset="0"/>
-              </a:rPr>
-              <a:t>                              Dataset</a:t>
-            </a:r>
-            <a:endParaRPr lang="en-IN" b="1" dirty="0">
-              <a:solidFill>
-                <a:schemeClr val="tx1"/>
-              </a:solidFill>
-              <a:latin typeface="Times New Roman" panose="02020603050405020304" pitchFamily="18" charset="0"/>
-              <a:cs typeface="Times New Roman" panose="02020603050405020304" pitchFamily="18" charset="0"/>
-            </a:endParaRPr>
-          </a:p>
-        </p:txBody>
-      </p:sp>
-      <p:sp>
-        <p:nvSpPr>
-          <p:cNvPr id="6" name="TextBox 5">
-            <a:extLst>
-              <a:ext uri="{FF2B5EF4-FFF2-40B4-BE49-F238E27FC236}">
-                <a16:creationId xmlns:a16="http://schemas.microsoft.com/office/drawing/2014/main" id="{4CEF2D42-7127-639E-7C19-7DB175142D9E}"/>
-              </a:ext>
-            </a:extLst>
-          </p:cNvPr>
-          <p:cNvSpPr txBox="1"/>
-          <p:nvPr/>
-        </p:nvSpPr>
-        <p:spPr>
-          <a:xfrm>
-            <a:off x="3386667" y="1464733"/>
-            <a:ext cx="3716866" cy="400110"/>
-          </a:xfrm>
-          <a:prstGeom prst="rect">
-            <a:avLst/>
-          </a:prstGeom>
-          <a:noFill/>
-        </p:spPr>
-        <p:txBody>
-          <a:bodyPr wrap="square" rtlCol="0">
-            <a:spAutoFit/>
-          </a:bodyPr>
-          <a:lstStyle/>
-          <a:p>
-            <a:r>
-              <a:rPr lang="en-US" sz="2000" dirty="0">
-                <a:latin typeface="Times New Roman" panose="02020603050405020304" pitchFamily="18" charset="0"/>
-                <a:cs typeface="Times New Roman" panose="02020603050405020304" pitchFamily="18" charset="0"/>
-              </a:rPr>
-              <a:t>         </a:t>
-            </a:r>
-            <a:r>
-              <a:rPr lang="en-US" sz="2000" dirty="0" err="1">
-                <a:latin typeface="Times New Roman" panose="02020603050405020304" pitchFamily="18" charset="0"/>
-                <a:cs typeface="Times New Roman" panose="02020603050405020304" pitchFamily="18" charset="0"/>
-              </a:rPr>
-              <a:t>Dim_Promotion</a:t>
-            </a:r>
-            <a:r>
-              <a:rPr lang="en-US" sz="2000" dirty="0">
-                <a:latin typeface="Times New Roman" panose="02020603050405020304" pitchFamily="18" charset="0"/>
-                <a:cs typeface="Times New Roman" panose="02020603050405020304" pitchFamily="18" charset="0"/>
-              </a:rPr>
-              <a:t> Table</a:t>
-            </a:r>
-            <a:endParaRPr lang="en-IN" sz="2000" dirty="0">
-              <a:latin typeface="Times New Roman" panose="02020603050405020304" pitchFamily="18" charset="0"/>
-              <a:cs typeface="Times New Roman" panose="02020603050405020304" pitchFamily="18" charset="0"/>
-            </a:endParaRPr>
-          </a:p>
-        </p:txBody>
-      </p:sp>
-      <p:pic>
-        <p:nvPicPr>
-          <p:cNvPr id="7" name="Content Placeholder 6">
-            <a:extLst>
-              <a:ext uri="{FF2B5EF4-FFF2-40B4-BE49-F238E27FC236}">
-                <a16:creationId xmlns:a16="http://schemas.microsoft.com/office/drawing/2014/main" id="{AF1BF393-D41F-AD85-24CB-D960403AFAD5}"/>
-              </a:ext>
-            </a:extLst>
-          </p:cNvPr>
-          <p:cNvPicPr>
-            <a:picLocks noGrp="1" noChangeAspect="1"/>
-          </p:cNvPicPr>
-          <p:nvPr>
-            <p:ph idx="1"/>
-          </p:nvPr>
-        </p:nvPicPr>
-        <p:blipFill>
-          <a:blip r:embed="rId2"/>
-          <a:stretch>
-            <a:fillRect/>
-          </a:stretch>
-        </p:blipFill>
-        <p:spPr>
-          <a:xfrm>
-            <a:off x="1611406" y="2563161"/>
-            <a:ext cx="8249801" cy="2562583"/>
-          </a:xfrm>
-          <a:prstGeom prst="rect">
-            <a:avLst/>
-          </a:prstGeom>
-        </p:spPr>
-      </p:pic>
-    </p:spTree>
-    <p:extLst>
-      <p:ext uri="{BB962C8B-B14F-4D97-AF65-F5344CB8AC3E}">
-        <p14:creationId xmlns:p14="http://schemas.microsoft.com/office/powerpoint/2010/main" val="1401234011"/>
-      </p:ext>
-    </p:extLst>
-  </p:cSld>
-  <p:clrMapOvr>
-    <a:masterClrMapping/>
-  </p:clrMapOvr>
-</p:sld>
-</file>
-
-<file path=ppt/slides/slide18.xml><?xml version="1.0" encoding="utf-8"?>
-<p:sld xmlns:a="http://schemas.openxmlformats.org/drawingml/2006/main" xmlns:r="http://schemas.openxmlformats.org/officeDocument/2006/relationships" xmlns:p="http://schemas.openxmlformats.org/presentationml/2006/main">
-  <p:cSld>
-    <p:spTree>
-      <p:nvGrpSpPr>
-        <p:cNvPr id="1" name="">
-          <a:extLst>
-            <a:ext uri="{FF2B5EF4-FFF2-40B4-BE49-F238E27FC236}">
-              <a16:creationId xmlns:a16="http://schemas.microsoft.com/office/drawing/2014/main" id="{B172E26E-6C71-A5F4-42E8-49AC0571431F}"/>
-            </a:ext>
-          </a:extLst>
-        </p:cNvPr>
-        <p:cNvGrpSpPr/>
-        <p:nvPr/>
-      </p:nvGrpSpPr>
-      <p:grpSpPr>
-        <a:xfrm>
-          <a:off x="0" y="0"/>
-          <a:ext cx="0" cy="0"/>
-          <a:chOff x="0" y="0"/>
-          <a:chExt cx="0" cy="0"/>
-        </a:xfrm>
-      </p:grpSpPr>
-      <p:sp>
-        <p:nvSpPr>
-          <p:cNvPr id="2" name="Title 1">
-            <a:extLst>
-              <a:ext uri="{FF2B5EF4-FFF2-40B4-BE49-F238E27FC236}">
-                <a16:creationId xmlns:a16="http://schemas.microsoft.com/office/drawing/2014/main" id="{812AAEA3-5CCB-870D-2813-ED27B559AACC}"/>
-              </a:ext>
-            </a:extLst>
-          </p:cNvPr>
-          <p:cNvSpPr>
-            <a:spLocks noGrp="1"/>
-          </p:cNvSpPr>
-          <p:nvPr>
-            <p:ph type="title"/>
-          </p:nvPr>
-        </p:nvSpPr>
-        <p:spPr/>
-        <p:txBody>
-          <a:bodyPr/>
-          <a:lstStyle/>
-          <a:p>
-            <a:r>
-              <a:rPr lang="en-US" b="1" dirty="0">
-                <a:solidFill>
-                  <a:schemeClr val="tx1"/>
-                </a:solidFill>
-                <a:latin typeface="Times New Roman" panose="02020603050405020304" pitchFamily="18" charset="0"/>
-                <a:cs typeface="Times New Roman" panose="02020603050405020304" pitchFamily="18" charset="0"/>
-              </a:rPr>
-              <a:t>                              Dataset</a:t>
-            </a:r>
-            <a:endParaRPr lang="en-IN" b="1" dirty="0">
-              <a:solidFill>
-                <a:schemeClr val="tx1"/>
-              </a:solidFill>
-              <a:latin typeface="Times New Roman" panose="02020603050405020304" pitchFamily="18" charset="0"/>
-              <a:cs typeface="Times New Roman" panose="02020603050405020304" pitchFamily="18" charset="0"/>
-            </a:endParaRPr>
-          </a:p>
-        </p:txBody>
-      </p:sp>
-      <p:sp>
-        <p:nvSpPr>
-          <p:cNvPr id="6" name="TextBox 5">
-            <a:extLst>
-              <a:ext uri="{FF2B5EF4-FFF2-40B4-BE49-F238E27FC236}">
-                <a16:creationId xmlns:a16="http://schemas.microsoft.com/office/drawing/2014/main" id="{62763E17-CFE6-8624-B371-9EC8B6F491C8}"/>
-              </a:ext>
-            </a:extLst>
-          </p:cNvPr>
-          <p:cNvSpPr txBox="1"/>
-          <p:nvPr/>
-        </p:nvSpPr>
-        <p:spPr>
-          <a:xfrm>
-            <a:off x="3386667" y="1464733"/>
-            <a:ext cx="3716866" cy="400110"/>
-          </a:xfrm>
-          <a:prstGeom prst="rect">
-            <a:avLst/>
-          </a:prstGeom>
-          <a:noFill/>
-        </p:spPr>
-        <p:txBody>
-          <a:bodyPr wrap="square" rtlCol="0">
-            <a:spAutoFit/>
-          </a:bodyPr>
-          <a:lstStyle/>
-          <a:p>
-            <a:r>
-              <a:rPr lang="en-US" sz="2000" dirty="0">
-                <a:latin typeface="Times New Roman" panose="02020603050405020304" pitchFamily="18" charset="0"/>
-                <a:cs typeface="Times New Roman" panose="02020603050405020304" pitchFamily="18" charset="0"/>
-              </a:rPr>
-              <a:t>         </a:t>
-            </a:r>
-            <a:r>
-              <a:rPr lang="en-US" sz="2000" dirty="0" err="1">
-                <a:latin typeface="Times New Roman" panose="02020603050405020304" pitchFamily="18" charset="0"/>
-                <a:cs typeface="Times New Roman" panose="02020603050405020304" pitchFamily="18" charset="0"/>
-              </a:rPr>
-              <a:t>Dim_Inventory</a:t>
-            </a:r>
-            <a:r>
-              <a:rPr lang="en-US" sz="2000" dirty="0">
-                <a:latin typeface="Times New Roman" panose="02020603050405020304" pitchFamily="18" charset="0"/>
-                <a:cs typeface="Times New Roman" panose="02020603050405020304" pitchFamily="18" charset="0"/>
-              </a:rPr>
-              <a:t> Table</a:t>
-            </a:r>
-            <a:endParaRPr lang="en-IN" sz="2000" dirty="0">
-              <a:latin typeface="Times New Roman" panose="02020603050405020304" pitchFamily="18" charset="0"/>
-              <a:cs typeface="Times New Roman" panose="02020603050405020304" pitchFamily="18" charset="0"/>
-            </a:endParaRPr>
-          </a:p>
-        </p:txBody>
-      </p:sp>
-      <p:pic>
-        <p:nvPicPr>
-          <p:cNvPr id="7" name="Content Placeholder 6">
-            <a:extLst>
-              <a:ext uri="{FF2B5EF4-FFF2-40B4-BE49-F238E27FC236}">
-                <a16:creationId xmlns:a16="http://schemas.microsoft.com/office/drawing/2014/main" id="{7FFC331E-9D31-AFB4-73AC-ACEDC5AB98CE}"/>
-              </a:ext>
-            </a:extLst>
-          </p:cNvPr>
-          <p:cNvPicPr>
-            <a:picLocks noGrp="1" noChangeAspect="1"/>
-          </p:cNvPicPr>
-          <p:nvPr>
-            <p:ph idx="1"/>
-          </p:nvPr>
-        </p:nvPicPr>
-        <p:blipFill>
-          <a:blip r:embed="rId2"/>
-          <a:stretch>
-            <a:fillRect/>
-          </a:stretch>
-        </p:blipFill>
-        <p:spPr>
-          <a:xfrm>
-            <a:off x="1314860" y="2186552"/>
-            <a:ext cx="8596312" cy="3295252"/>
-          </a:xfrm>
-          <a:prstGeom prst="rect">
-            <a:avLst/>
-          </a:prstGeom>
-        </p:spPr>
-      </p:pic>
-    </p:spTree>
-    <p:extLst>
-      <p:ext uri="{BB962C8B-B14F-4D97-AF65-F5344CB8AC3E}">
-        <p14:creationId xmlns:p14="http://schemas.microsoft.com/office/powerpoint/2010/main" val="1953372434"/>
-      </p:ext>
-    </p:extLst>
-  </p:cSld>
-  <p:clrMapOvr>
-    <a:masterClrMapping/>
-  </p:clrMapOvr>
-</p:sld>
-</file>
-
-<file path=ppt/slides/slide19.xml><?xml version="1.0" encoding="utf-8"?>
-<p:sld xmlns:a="http://schemas.openxmlformats.org/drawingml/2006/main" xmlns:r="http://schemas.openxmlformats.org/officeDocument/2006/relationships" xmlns:p="http://schemas.openxmlformats.org/presentationml/2006/main">
-  <p:cSld>
-    <p:spTree>
-      <p:nvGrpSpPr>
-        <p:cNvPr id="1" name=""/>
-        <p:cNvGrpSpPr/>
-        <p:nvPr/>
-      </p:nvGrpSpPr>
-      <p:grpSpPr>
-        <a:xfrm>
-          <a:off x="0" y="0"/>
-          <a:ext cx="0" cy="0"/>
-          <a:chOff x="0" y="0"/>
-          <a:chExt cx="0" cy="0"/>
-        </a:xfrm>
-      </p:grpSpPr>
-      <p:sp>
-        <p:nvSpPr>
-          <p:cNvPr id="2" name="Title 1">
-            <a:extLst>
-              <a:ext uri="{FF2B5EF4-FFF2-40B4-BE49-F238E27FC236}">
-                <a16:creationId xmlns:a16="http://schemas.microsoft.com/office/drawing/2014/main" id="{AC40CC8D-59A4-E289-B568-FAC8683AD8F9}"/>
-              </a:ext>
-            </a:extLst>
-          </p:cNvPr>
-          <p:cNvSpPr>
-            <a:spLocks noGrp="1"/>
-          </p:cNvSpPr>
-          <p:nvPr>
-            <p:ph type="title"/>
-          </p:nvPr>
-        </p:nvSpPr>
-        <p:spPr/>
-        <p:txBody>
-          <a:bodyPr/>
-          <a:lstStyle/>
-          <a:p>
-            <a:endParaRPr lang="en-IN"/>
-          </a:p>
-        </p:txBody>
-      </p:sp>
-      <p:pic>
-        <p:nvPicPr>
-          <p:cNvPr id="7" name="Content Placeholder 6">
-            <a:extLst>
-              <a:ext uri="{FF2B5EF4-FFF2-40B4-BE49-F238E27FC236}">
-                <a16:creationId xmlns:a16="http://schemas.microsoft.com/office/drawing/2014/main" id="{142092B4-461D-7419-E0C8-DEAC925F36CF}"/>
-              </a:ext>
-            </a:extLst>
-          </p:cNvPr>
-          <p:cNvPicPr>
-            <a:picLocks noGrp="1" noChangeAspect="1"/>
-          </p:cNvPicPr>
-          <p:nvPr>
-            <p:ph idx="1"/>
-          </p:nvPr>
-        </p:nvPicPr>
-        <p:blipFill>
-          <a:blip r:embed="rId2">
-            <a:extLst>
-              <a:ext uri="{28A0092B-C50C-407E-A947-70E740481C1C}">
-                <a14:useLocalDpi xmlns:a14="http://schemas.microsoft.com/office/drawing/2010/main" val="0"/>
-              </a:ext>
-            </a:extLst>
-          </a:blip>
-          <a:stretch>
-            <a:fillRect/>
-          </a:stretch>
-        </p:blipFill>
-        <p:spPr bwMode="auto">
-          <a:xfrm>
-            <a:off x="0" y="0"/>
-            <a:ext cx="12191999" cy="6858000"/>
-          </a:xfrm>
-          <a:prstGeom prst="rect">
-            <a:avLst/>
-          </a:prstGeom>
-          <a:noFill/>
-          <a:extLst>
-            <a:ext uri="{909E8E84-426E-40DD-AFC4-6F175D3DCCD1}">
-              <a14:hiddenFill xmlns:a14="http://schemas.microsoft.com/office/drawing/2010/main">
-                <a:solidFill>
-                  <a:srgbClr val="FFFFFF"/>
-                </a:solidFill>
-              </a14:hiddenFill>
-            </a:ext>
-          </a:extLst>
-        </p:spPr>
-      </p:pic>
-    </p:spTree>
-    <p:extLst>
-      <p:ext uri="{BB962C8B-B14F-4D97-AF65-F5344CB8AC3E}">
-        <p14:creationId xmlns:p14="http://schemas.microsoft.com/office/powerpoint/2010/main" val="336565014"/>
       </p:ext>
     </p:extLst>
   </p:cSld>
@@ -7587,6 +7839,780 @@
           <p:cNvPr id="2" name="Title 1">
             <a:extLst>
               <a:ext uri="{FF2B5EF4-FFF2-40B4-BE49-F238E27FC236}">
+                <a16:creationId xmlns:a16="http://schemas.microsoft.com/office/drawing/2014/main" id="{5C3E4E1F-FDC9-0338-A8EE-D3959935D3D6}"/>
+              </a:ext>
+            </a:extLst>
+          </p:cNvPr>
+          <p:cNvSpPr>
+            <a:spLocks noGrp="1"/>
+          </p:cNvSpPr>
+          <p:nvPr>
+            <p:ph type="title"/>
+          </p:nvPr>
+        </p:nvSpPr>
+        <p:spPr>
+          <a:xfrm>
+            <a:off x="2789162" y="511628"/>
+            <a:ext cx="8596668" cy="1320800"/>
+          </a:xfrm>
+        </p:spPr>
+        <p:txBody>
+          <a:bodyPr>
+            <a:normAutofit/>
+          </a:bodyPr>
+          <a:lstStyle/>
+          <a:p>
+            <a:r>
+              <a:rPr lang="en-US" sz="3800" b="1" dirty="0">
+                <a:solidFill>
+                  <a:schemeClr val="tx1"/>
+                </a:solidFill>
+                <a:latin typeface="Times New Roman" panose="02020603050405020304" pitchFamily="18" charset="0"/>
+                <a:cs typeface="Times New Roman" panose="02020603050405020304" pitchFamily="18" charset="0"/>
+              </a:rPr>
+              <a:t>TABLE OF CONTENTS</a:t>
+            </a:r>
+            <a:endParaRPr lang="en-IN" sz="3800" b="1" dirty="0">
+              <a:solidFill>
+                <a:schemeClr val="tx1"/>
+              </a:solidFill>
+              <a:latin typeface="Times New Roman" panose="02020603050405020304" pitchFamily="18" charset="0"/>
+              <a:cs typeface="Times New Roman" panose="02020603050405020304" pitchFamily="18" charset="0"/>
+            </a:endParaRPr>
+          </a:p>
+        </p:txBody>
+      </p:sp>
+      <p:sp>
+        <p:nvSpPr>
+          <p:cNvPr id="3" name="Content Placeholder 2">
+            <a:extLst>
+              <a:ext uri="{FF2B5EF4-FFF2-40B4-BE49-F238E27FC236}">
+                <a16:creationId xmlns:a16="http://schemas.microsoft.com/office/drawing/2014/main" id="{C1FC9FCD-9930-CA09-BE2A-F31C7250DCB1}"/>
+              </a:ext>
+            </a:extLst>
+          </p:cNvPr>
+          <p:cNvSpPr>
+            <a:spLocks noGrp="1"/>
+          </p:cNvSpPr>
+          <p:nvPr>
+            <p:ph idx="1"/>
+          </p:nvPr>
+        </p:nvSpPr>
+        <p:spPr>
+          <a:xfrm>
+            <a:off x="677334" y="1284515"/>
+            <a:ext cx="10284580" cy="4756848"/>
+          </a:xfrm>
+        </p:spPr>
+        <p:txBody>
+          <a:bodyPr>
+            <a:normAutofit/>
+          </a:bodyPr>
+          <a:lstStyle/>
+          <a:p>
+            <a:r>
+              <a:rPr lang="en-US" sz="3600" dirty="0">
+                <a:latin typeface="Times New Roman" panose="02020603050405020304" pitchFamily="18" charset="0"/>
+                <a:cs typeface="Times New Roman" panose="02020603050405020304" pitchFamily="18" charset="0"/>
+              </a:rPr>
+              <a:t>Problem Statement</a:t>
+            </a:r>
+          </a:p>
+          <a:p>
+            <a:r>
+              <a:rPr lang="en-US" sz="3600" dirty="0">
+                <a:latin typeface="Times New Roman" panose="02020603050405020304" pitchFamily="18" charset="0"/>
+                <a:cs typeface="Times New Roman" panose="02020603050405020304" pitchFamily="18" charset="0"/>
+              </a:rPr>
+              <a:t>Functional Diagram</a:t>
+            </a:r>
+          </a:p>
+          <a:p>
+            <a:r>
+              <a:rPr lang="en-US" sz="3600" dirty="0">
+                <a:latin typeface="Times New Roman" panose="02020603050405020304" pitchFamily="18" charset="0"/>
+                <a:cs typeface="Times New Roman" panose="02020603050405020304" pitchFamily="18" charset="0"/>
+              </a:rPr>
+              <a:t>Tools and Technologies</a:t>
+            </a:r>
+          </a:p>
+          <a:p>
+            <a:r>
+              <a:rPr lang="en-US" sz="3600" dirty="0">
+                <a:latin typeface="Times New Roman" panose="02020603050405020304" pitchFamily="18" charset="0"/>
+                <a:cs typeface="Times New Roman" panose="02020603050405020304" pitchFamily="18" charset="0"/>
+              </a:rPr>
+              <a:t>Technical Diagram</a:t>
+            </a:r>
+          </a:p>
+          <a:p>
+            <a:r>
+              <a:rPr lang="en-US" sz="3600" dirty="0">
+                <a:latin typeface="Times New Roman" panose="02020603050405020304" pitchFamily="18" charset="0"/>
+                <a:cs typeface="Times New Roman" panose="02020603050405020304" pitchFamily="18" charset="0"/>
+              </a:rPr>
+              <a:t>Dataset</a:t>
+            </a:r>
+          </a:p>
+          <a:p>
+            <a:r>
+              <a:rPr lang="en-US" sz="3600" dirty="0">
+                <a:latin typeface="Times New Roman" panose="02020603050405020304" pitchFamily="18" charset="0"/>
+                <a:cs typeface="Times New Roman" panose="02020603050405020304" pitchFamily="18" charset="0"/>
+              </a:rPr>
+              <a:t>Schema Modeling</a:t>
+            </a:r>
+          </a:p>
+          <a:p>
+            <a:r>
+              <a:rPr lang="en-US" sz="3600" dirty="0">
+                <a:latin typeface="Times New Roman" panose="02020603050405020304" pitchFamily="18" charset="0"/>
+                <a:cs typeface="Times New Roman" panose="02020603050405020304" pitchFamily="18" charset="0"/>
+              </a:rPr>
+              <a:t>Key Performance Indicators</a:t>
+            </a:r>
+          </a:p>
+          <a:p>
+            <a:endParaRPr lang="en-US" dirty="0"/>
+          </a:p>
+          <a:p>
+            <a:endParaRPr lang="en-IN" dirty="0"/>
+          </a:p>
+        </p:txBody>
+      </p:sp>
+    </p:spTree>
+    <p:extLst>
+      <p:ext uri="{BB962C8B-B14F-4D97-AF65-F5344CB8AC3E}">
+        <p14:creationId xmlns:p14="http://schemas.microsoft.com/office/powerpoint/2010/main" val="1388118647"/>
+      </p:ext>
+    </p:extLst>
+  </p:cSld>
+  <p:clrMapOvr>
+    <a:masterClrMapping/>
+  </p:clrMapOvr>
+</p:sld>
+</file>
+
+<file path=ppt/slides/slide20.xml><?xml version="1.0" encoding="utf-8"?>
+<p:sld xmlns:a="http://schemas.openxmlformats.org/drawingml/2006/main" xmlns:r="http://schemas.openxmlformats.org/officeDocument/2006/relationships" xmlns:p="http://schemas.openxmlformats.org/presentationml/2006/main">
+  <p:cSld>
+    <p:spTree>
+      <p:nvGrpSpPr>
+        <p:cNvPr id="1" name="">
+          <a:extLst>
+            <a:ext uri="{FF2B5EF4-FFF2-40B4-BE49-F238E27FC236}">
+              <a16:creationId xmlns:a16="http://schemas.microsoft.com/office/drawing/2014/main" id="{377E9DE7-5D00-5C0E-0341-F9FD7B7A13EE}"/>
+            </a:ext>
+          </a:extLst>
+        </p:cNvPr>
+        <p:cNvGrpSpPr/>
+        <p:nvPr/>
+      </p:nvGrpSpPr>
+      <p:grpSpPr>
+        <a:xfrm>
+          <a:off x="0" y="0"/>
+          <a:ext cx="0" cy="0"/>
+          <a:chOff x="0" y="0"/>
+          <a:chExt cx="0" cy="0"/>
+        </a:xfrm>
+      </p:grpSpPr>
+      <p:sp>
+        <p:nvSpPr>
+          <p:cNvPr id="2" name="Title 1">
+            <a:extLst>
+              <a:ext uri="{FF2B5EF4-FFF2-40B4-BE49-F238E27FC236}">
+                <a16:creationId xmlns:a16="http://schemas.microsoft.com/office/drawing/2014/main" id="{FCE510CE-FD49-B9A3-0DDE-EB04BA8BD981}"/>
+              </a:ext>
+            </a:extLst>
+          </p:cNvPr>
+          <p:cNvSpPr>
+            <a:spLocks noGrp="1"/>
+          </p:cNvSpPr>
+          <p:nvPr>
+            <p:ph type="title"/>
+          </p:nvPr>
+        </p:nvSpPr>
+        <p:spPr/>
+        <p:txBody>
+          <a:bodyPr/>
+          <a:lstStyle/>
+          <a:p>
+            <a:r>
+              <a:rPr lang="en-US" b="1" dirty="0">
+                <a:solidFill>
+                  <a:schemeClr val="tx1"/>
+                </a:solidFill>
+                <a:latin typeface="Times New Roman" panose="02020603050405020304" pitchFamily="18" charset="0"/>
+                <a:cs typeface="Times New Roman" panose="02020603050405020304" pitchFamily="18" charset="0"/>
+              </a:rPr>
+              <a:t>                              Dataset</a:t>
+            </a:r>
+            <a:endParaRPr lang="en-IN" b="1" dirty="0">
+              <a:solidFill>
+                <a:schemeClr val="tx1"/>
+              </a:solidFill>
+              <a:latin typeface="Times New Roman" panose="02020603050405020304" pitchFamily="18" charset="0"/>
+              <a:cs typeface="Times New Roman" panose="02020603050405020304" pitchFamily="18" charset="0"/>
+            </a:endParaRPr>
+          </a:p>
+        </p:txBody>
+      </p:sp>
+      <p:sp>
+        <p:nvSpPr>
+          <p:cNvPr id="6" name="TextBox 5">
+            <a:extLst>
+              <a:ext uri="{FF2B5EF4-FFF2-40B4-BE49-F238E27FC236}">
+                <a16:creationId xmlns:a16="http://schemas.microsoft.com/office/drawing/2014/main" id="{768EF2E5-D081-08EB-A255-AB101520C29D}"/>
+              </a:ext>
+            </a:extLst>
+          </p:cNvPr>
+          <p:cNvSpPr txBox="1"/>
+          <p:nvPr/>
+        </p:nvSpPr>
+        <p:spPr>
+          <a:xfrm>
+            <a:off x="3386667" y="1464733"/>
+            <a:ext cx="3716866" cy="400110"/>
+          </a:xfrm>
+          <a:prstGeom prst="rect">
+            <a:avLst/>
+          </a:prstGeom>
+          <a:noFill/>
+        </p:spPr>
+        <p:txBody>
+          <a:bodyPr wrap="square" rtlCol="0">
+            <a:spAutoFit/>
+          </a:bodyPr>
+          <a:lstStyle/>
+          <a:p>
+            <a:r>
+              <a:rPr lang="en-US" sz="2000" dirty="0">
+                <a:latin typeface="Times New Roman" panose="02020603050405020304" pitchFamily="18" charset="0"/>
+                <a:cs typeface="Times New Roman" panose="02020603050405020304" pitchFamily="18" charset="0"/>
+              </a:rPr>
+              <a:t>         </a:t>
+            </a:r>
+            <a:r>
+              <a:rPr lang="en-US" sz="2000" dirty="0" err="1">
+                <a:latin typeface="Times New Roman" panose="02020603050405020304" pitchFamily="18" charset="0"/>
+                <a:cs typeface="Times New Roman" panose="02020603050405020304" pitchFamily="18" charset="0"/>
+              </a:rPr>
+              <a:t>Dim_Branch</a:t>
+            </a:r>
+            <a:r>
+              <a:rPr lang="en-US" sz="2000" dirty="0">
+                <a:latin typeface="Times New Roman" panose="02020603050405020304" pitchFamily="18" charset="0"/>
+                <a:cs typeface="Times New Roman" panose="02020603050405020304" pitchFamily="18" charset="0"/>
+              </a:rPr>
+              <a:t> Table</a:t>
+            </a:r>
+            <a:endParaRPr lang="en-IN" sz="2000" dirty="0">
+              <a:latin typeface="Times New Roman" panose="02020603050405020304" pitchFamily="18" charset="0"/>
+              <a:cs typeface="Times New Roman" panose="02020603050405020304" pitchFamily="18" charset="0"/>
+            </a:endParaRPr>
+          </a:p>
+        </p:txBody>
+      </p:sp>
+      <p:pic>
+        <p:nvPicPr>
+          <p:cNvPr id="7" name="Content Placeholder 6">
+            <a:extLst>
+              <a:ext uri="{FF2B5EF4-FFF2-40B4-BE49-F238E27FC236}">
+                <a16:creationId xmlns:a16="http://schemas.microsoft.com/office/drawing/2014/main" id="{1E9AA8C6-D4BF-E4E6-6213-399413A409D9}"/>
+              </a:ext>
+            </a:extLst>
+          </p:cNvPr>
+          <p:cNvPicPr>
+            <a:picLocks noGrp="1" noChangeAspect="1"/>
+          </p:cNvPicPr>
+          <p:nvPr>
+            <p:ph idx="1"/>
+          </p:nvPr>
+        </p:nvPicPr>
+        <p:blipFill>
+          <a:blip r:embed="rId2"/>
+          <a:stretch>
+            <a:fillRect/>
+          </a:stretch>
+        </p:blipFill>
+        <p:spPr>
+          <a:xfrm>
+            <a:off x="1499796" y="2494165"/>
+            <a:ext cx="8596312" cy="2016190"/>
+          </a:xfrm>
+          <a:prstGeom prst="rect">
+            <a:avLst/>
+          </a:prstGeom>
+        </p:spPr>
+      </p:pic>
+    </p:spTree>
+    <p:extLst>
+      <p:ext uri="{BB962C8B-B14F-4D97-AF65-F5344CB8AC3E}">
+        <p14:creationId xmlns:p14="http://schemas.microsoft.com/office/powerpoint/2010/main" val="4190939066"/>
+      </p:ext>
+    </p:extLst>
+  </p:cSld>
+  <p:clrMapOvr>
+    <a:masterClrMapping/>
+  </p:clrMapOvr>
+</p:sld>
+</file>
+
+<file path=ppt/slides/slide21.xml><?xml version="1.0" encoding="utf-8"?>
+<p:sld xmlns:a="http://schemas.openxmlformats.org/drawingml/2006/main" xmlns:r="http://schemas.openxmlformats.org/officeDocument/2006/relationships" xmlns:p="http://schemas.openxmlformats.org/presentationml/2006/main">
+  <p:cSld>
+    <p:spTree>
+      <p:nvGrpSpPr>
+        <p:cNvPr id="1" name="">
+          <a:extLst>
+            <a:ext uri="{FF2B5EF4-FFF2-40B4-BE49-F238E27FC236}">
+              <a16:creationId xmlns:a16="http://schemas.microsoft.com/office/drawing/2014/main" id="{CD76A32B-AA68-682C-AEA7-913B1C001A3D}"/>
+            </a:ext>
+          </a:extLst>
+        </p:cNvPr>
+        <p:cNvGrpSpPr/>
+        <p:nvPr/>
+      </p:nvGrpSpPr>
+      <p:grpSpPr>
+        <a:xfrm>
+          <a:off x="0" y="0"/>
+          <a:ext cx="0" cy="0"/>
+          <a:chOff x="0" y="0"/>
+          <a:chExt cx="0" cy="0"/>
+        </a:xfrm>
+      </p:grpSpPr>
+      <p:sp>
+        <p:nvSpPr>
+          <p:cNvPr id="2" name="Title 1">
+            <a:extLst>
+              <a:ext uri="{FF2B5EF4-FFF2-40B4-BE49-F238E27FC236}">
+                <a16:creationId xmlns:a16="http://schemas.microsoft.com/office/drawing/2014/main" id="{63966F0F-92BF-54B6-9EF3-A700D40A30D3}"/>
+              </a:ext>
+            </a:extLst>
+          </p:cNvPr>
+          <p:cNvSpPr>
+            <a:spLocks noGrp="1"/>
+          </p:cNvSpPr>
+          <p:nvPr>
+            <p:ph type="title"/>
+          </p:nvPr>
+        </p:nvSpPr>
+        <p:spPr/>
+        <p:txBody>
+          <a:bodyPr/>
+          <a:lstStyle/>
+          <a:p>
+            <a:r>
+              <a:rPr lang="en-US" b="1" dirty="0">
+                <a:solidFill>
+                  <a:schemeClr val="tx1"/>
+                </a:solidFill>
+                <a:latin typeface="Times New Roman" panose="02020603050405020304" pitchFamily="18" charset="0"/>
+                <a:cs typeface="Times New Roman" panose="02020603050405020304" pitchFamily="18" charset="0"/>
+              </a:rPr>
+              <a:t>                              Dataset</a:t>
+            </a:r>
+            <a:endParaRPr lang="en-IN" b="1" dirty="0">
+              <a:solidFill>
+                <a:schemeClr val="tx1"/>
+              </a:solidFill>
+              <a:latin typeface="Times New Roman" panose="02020603050405020304" pitchFamily="18" charset="0"/>
+              <a:cs typeface="Times New Roman" panose="02020603050405020304" pitchFamily="18" charset="0"/>
+            </a:endParaRPr>
+          </a:p>
+        </p:txBody>
+      </p:sp>
+      <p:sp>
+        <p:nvSpPr>
+          <p:cNvPr id="6" name="TextBox 5">
+            <a:extLst>
+              <a:ext uri="{FF2B5EF4-FFF2-40B4-BE49-F238E27FC236}">
+                <a16:creationId xmlns:a16="http://schemas.microsoft.com/office/drawing/2014/main" id="{4CEF2D42-7127-639E-7C19-7DB175142D9E}"/>
+              </a:ext>
+            </a:extLst>
+          </p:cNvPr>
+          <p:cNvSpPr txBox="1"/>
+          <p:nvPr/>
+        </p:nvSpPr>
+        <p:spPr>
+          <a:xfrm>
+            <a:off x="3386667" y="1464733"/>
+            <a:ext cx="3716866" cy="400110"/>
+          </a:xfrm>
+          <a:prstGeom prst="rect">
+            <a:avLst/>
+          </a:prstGeom>
+          <a:noFill/>
+        </p:spPr>
+        <p:txBody>
+          <a:bodyPr wrap="square" rtlCol="0">
+            <a:spAutoFit/>
+          </a:bodyPr>
+          <a:lstStyle/>
+          <a:p>
+            <a:r>
+              <a:rPr lang="en-US" sz="2000" dirty="0">
+                <a:latin typeface="Times New Roman" panose="02020603050405020304" pitchFamily="18" charset="0"/>
+                <a:cs typeface="Times New Roman" panose="02020603050405020304" pitchFamily="18" charset="0"/>
+              </a:rPr>
+              <a:t>         </a:t>
+            </a:r>
+            <a:r>
+              <a:rPr lang="en-US" sz="2000" dirty="0" err="1">
+                <a:latin typeface="Times New Roman" panose="02020603050405020304" pitchFamily="18" charset="0"/>
+                <a:cs typeface="Times New Roman" panose="02020603050405020304" pitchFamily="18" charset="0"/>
+              </a:rPr>
+              <a:t>Dim_Promotion</a:t>
+            </a:r>
+            <a:r>
+              <a:rPr lang="en-US" sz="2000" dirty="0">
+                <a:latin typeface="Times New Roman" panose="02020603050405020304" pitchFamily="18" charset="0"/>
+                <a:cs typeface="Times New Roman" panose="02020603050405020304" pitchFamily="18" charset="0"/>
+              </a:rPr>
+              <a:t> Table</a:t>
+            </a:r>
+            <a:endParaRPr lang="en-IN" sz="2000" dirty="0">
+              <a:latin typeface="Times New Roman" panose="02020603050405020304" pitchFamily="18" charset="0"/>
+              <a:cs typeface="Times New Roman" panose="02020603050405020304" pitchFamily="18" charset="0"/>
+            </a:endParaRPr>
+          </a:p>
+        </p:txBody>
+      </p:sp>
+      <p:pic>
+        <p:nvPicPr>
+          <p:cNvPr id="7" name="Content Placeholder 6">
+            <a:extLst>
+              <a:ext uri="{FF2B5EF4-FFF2-40B4-BE49-F238E27FC236}">
+                <a16:creationId xmlns:a16="http://schemas.microsoft.com/office/drawing/2014/main" id="{AF1BF393-D41F-AD85-24CB-D960403AFAD5}"/>
+              </a:ext>
+            </a:extLst>
+          </p:cNvPr>
+          <p:cNvPicPr>
+            <a:picLocks noGrp="1" noChangeAspect="1"/>
+          </p:cNvPicPr>
+          <p:nvPr>
+            <p:ph idx="1"/>
+          </p:nvPr>
+        </p:nvPicPr>
+        <p:blipFill>
+          <a:blip r:embed="rId2"/>
+          <a:stretch>
+            <a:fillRect/>
+          </a:stretch>
+        </p:blipFill>
+        <p:spPr>
+          <a:xfrm>
+            <a:off x="1611406" y="2563161"/>
+            <a:ext cx="8249801" cy="2562583"/>
+          </a:xfrm>
+          <a:prstGeom prst="rect">
+            <a:avLst/>
+          </a:prstGeom>
+        </p:spPr>
+      </p:pic>
+    </p:spTree>
+    <p:extLst>
+      <p:ext uri="{BB962C8B-B14F-4D97-AF65-F5344CB8AC3E}">
+        <p14:creationId xmlns:p14="http://schemas.microsoft.com/office/powerpoint/2010/main" val="1401234011"/>
+      </p:ext>
+    </p:extLst>
+  </p:cSld>
+  <p:clrMapOvr>
+    <a:masterClrMapping/>
+  </p:clrMapOvr>
+</p:sld>
+</file>
+
+<file path=ppt/slides/slide22.xml><?xml version="1.0" encoding="utf-8"?>
+<p:sld xmlns:a="http://schemas.openxmlformats.org/drawingml/2006/main" xmlns:r="http://schemas.openxmlformats.org/officeDocument/2006/relationships" xmlns:p="http://schemas.openxmlformats.org/presentationml/2006/main">
+  <p:cSld>
+    <p:spTree>
+      <p:nvGrpSpPr>
+        <p:cNvPr id="1" name="">
+          <a:extLst>
+            <a:ext uri="{FF2B5EF4-FFF2-40B4-BE49-F238E27FC236}">
+              <a16:creationId xmlns:a16="http://schemas.microsoft.com/office/drawing/2014/main" id="{B172E26E-6C71-A5F4-42E8-49AC0571431F}"/>
+            </a:ext>
+          </a:extLst>
+        </p:cNvPr>
+        <p:cNvGrpSpPr/>
+        <p:nvPr/>
+      </p:nvGrpSpPr>
+      <p:grpSpPr>
+        <a:xfrm>
+          <a:off x="0" y="0"/>
+          <a:ext cx="0" cy="0"/>
+          <a:chOff x="0" y="0"/>
+          <a:chExt cx="0" cy="0"/>
+        </a:xfrm>
+      </p:grpSpPr>
+      <p:sp>
+        <p:nvSpPr>
+          <p:cNvPr id="2" name="Title 1">
+            <a:extLst>
+              <a:ext uri="{FF2B5EF4-FFF2-40B4-BE49-F238E27FC236}">
+                <a16:creationId xmlns:a16="http://schemas.microsoft.com/office/drawing/2014/main" id="{812AAEA3-5CCB-870D-2813-ED27B559AACC}"/>
+              </a:ext>
+            </a:extLst>
+          </p:cNvPr>
+          <p:cNvSpPr>
+            <a:spLocks noGrp="1"/>
+          </p:cNvSpPr>
+          <p:nvPr>
+            <p:ph type="title"/>
+          </p:nvPr>
+        </p:nvSpPr>
+        <p:spPr/>
+        <p:txBody>
+          <a:bodyPr/>
+          <a:lstStyle/>
+          <a:p>
+            <a:r>
+              <a:rPr lang="en-US" b="1" dirty="0">
+                <a:solidFill>
+                  <a:schemeClr val="tx1"/>
+                </a:solidFill>
+                <a:latin typeface="Times New Roman" panose="02020603050405020304" pitchFamily="18" charset="0"/>
+                <a:cs typeface="Times New Roman" panose="02020603050405020304" pitchFamily="18" charset="0"/>
+              </a:rPr>
+              <a:t>                              Dataset</a:t>
+            </a:r>
+            <a:endParaRPr lang="en-IN" b="1" dirty="0">
+              <a:solidFill>
+                <a:schemeClr val="tx1"/>
+              </a:solidFill>
+              <a:latin typeface="Times New Roman" panose="02020603050405020304" pitchFamily="18" charset="0"/>
+              <a:cs typeface="Times New Roman" panose="02020603050405020304" pitchFamily="18" charset="0"/>
+            </a:endParaRPr>
+          </a:p>
+        </p:txBody>
+      </p:sp>
+      <p:sp>
+        <p:nvSpPr>
+          <p:cNvPr id="6" name="TextBox 5">
+            <a:extLst>
+              <a:ext uri="{FF2B5EF4-FFF2-40B4-BE49-F238E27FC236}">
+                <a16:creationId xmlns:a16="http://schemas.microsoft.com/office/drawing/2014/main" id="{62763E17-CFE6-8624-B371-9EC8B6F491C8}"/>
+              </a:ext>
+            </a:extLst>
+          </p:cNvPr>
+          <p:cNvSpPr txBox="1"/>
+          <p:nvPr/>
+        </p:nvSpPr>
+        <p:spPr>
+          <a:xfrm>
+            <a:off x="3386667" y="1464733"/>
+            <a:ext cx="3716866" cy="400110"/>
+          </a:xfrm>
+          <a:prstGeom prst="rect">
+            <a:avLst/>
+          </a:prstGeom>
+          <a:noFill/>
+        </p:spPr>
+        <p:txBody>
+          <a:bodyPr wrap="square" rtlCol="0">
+            <a:spAutoFit/>
+          </a:bodyPr>
+          <a:lstStyle/>
+          <a:p>
+            <a:r>
+              <a:rPr lang="en-US" sz="2000" dirty="0">
+                <a:latin typeface="Times New Roman" panose="02020603050405020304" pitchFamily="18" charset="0"/>
+                <a:cs typeface="Times New Roman" panose="02020603050405020304" pitchFamily="18" charset="0"/>
+              </a:rPr>
+              <a:t>         </a:t>
+            </a:r>
+            <a:r>
+              <a:rPr lang="en-US" sz="2000" dirty="0" err="1">
+                <a:latin typeface="Times New Roman" panose="02020603050405020304" pitchFamily="18" charset="0"/>
+                <a:cs typeface="Times New Roman" panose="02020603050405020304" pitchFamily="18" charset="0"/>
+              </a:rPr>
+              <a:t>Dim_Inventory</a:t>
+            </a:r>
+            <a:r>
+              <a:rPr lang="en-US" sz="2000" dirty="0">
+                <a:latin typeface="Times New Roman" panose="02020603050405020304" pitchFamily="18" charset="0"/>
+                <a:cs typeface="Times New Roman" panose="02020603050405020304" pitchFamily="18" charset="0"/>
+              </a:rPr>
+              <a:t> Table</a:t>
+            </a:r>
+            <a:endParaRPr lang="en-IN" sz="2000" dirty="0">
+              <a:latin typeface="Times New Roman" panose="02020603050405020304" pitchFamily="18" charset="0"/>
+              <a:cs typeface="Times New Roman" panose="02020603050405020304" pitchFamily="18" charset="0"/>
+            </a:endParaRPr>
+          </a:p>
+        </p:txBody>
+      </p:sp>
+      <p:pic>
+        <p:nvPicPr>
+          <p:cNvPr id="7" name="Content Placeholder 6">
+            <a:extLst>
+              <a:ext uri="{FF2B5EF4-FFF2-40B4-BE49-F238E27FC236}">
+                <a16:creationId xmlns:a16="http://schemas.microsoft.com/office/drawing/2014/main" id="{7FFC331E-9D31-AFB4-73AC-ACEDC5AB98CE}"/>
+              </a:ext>
+            </a:extLst>
+          </p:cNvPr>
+          <p:cNvPicPr>
+            <a:picLocks noGrp="1" noChangeAspect="1"/>
+          </p:cNvPicPr>
+          <p:nvPr>
+            <p:ph idx="1"/>
+          </p:nvPr>
+        </p:nvPicPr>
+        <p:blipFill>
+          <a:blip r:embed="rId2"/>
+          <a:stretch>
+            <a:fillRect/>
+          </a:stretch>
+        </p:blipFill>
+        <p:spPr>
+          <a:xfrm>
+            <a:off x="1314860" y="2186552"/>
+            <a:ext cx="8596312" cy="3295252"/>
+          </a:xfrm>
+          <a:prstGeom prst="rect">
+            <a:avLst/>
+          </a:prstGeom>
+        </p:spPr>
+      </p:pic>
+    </p:spTree>
+    <p:extLst>
+      <p:ext uri="{BB962C8B-B14F-4D97-AF65-F5344CB8AC3E}">
+        <p14:creationId xmlns:p14="http://schemas.microsoft.com/office/powerpoint/2010/main" val="1953372434"/>
+      </p:ext>
+    </p:extLst>
+  </p:cSld>
+  <p:clrMapOvr>
+    <a:masterClrMapping/>
+  </p:clrMapOvr>
+</p:sld>
+</file>
+
+<file path=ppt/slides/slide23.xml><?xml version="1.0" encoding="utf-8"?>
+<p:sld xmlns:a="http://schemas.openxmlformats.org/drawingml/2006/main" xmlns:r="http://schemas.openxmlformats.org/officeDocument/2006/relationships" xmlns:p="http://schemas.openxmlformats.org/presentationml/2006/main">
+  <p:cSld>
+    <p:spTree>
+      <p:nvGrpSpPr>
+        <p:cNvPr id="1" name=""/>
+        <p:cNvGrpSpPr/>
+        <p:nvPr/>
+      </p:nvGrpSpPr>
+      <p:grpSpPr>
+        <a:xfrm>
+          <a:off x="0" y="0"/>
+          <a:ext cx="0" cy="0"/>
+          <a:chOff x="0" y="0"/>
+          <a:chExt cx="0" cy="0"/>
+        </a:xfrm>
+      </p:grpSpPr>
+      <p:sp>
+        <p:nvSpPr>
+          <p:cNvPr id="2" name="Title 1">
+            <a:extLst>
+              <a:ext uri="{FF2B5EF4-FFF2-40B4-BE49-F238E27FC236}">
+                <a16:creationId xmlns:a16="http://schemas.microsoft.com/office/drawing/2014/main" id="{AC40CC8D-59A4-E289-B568-FAC8683AD8F9}"/>
+              </a:ext>
+            </a:extLst>
+          </p:cNvPr>
+          <p:cNvSpPr>
+            <a:spLocks noGrp="1"/>
+          </p:cNvSpPr>
+          <p:nvPr>
+            <p:ph type="title"/>
+          </p:nvPr>
+        </p:nvSpPr>
+        <p:spPr/>
+        <p:txBody>
+          <a:bodyPr/>
+          <a:lstStyle/>
+          <a:p>
+            <a:endParaRPr lang="en-IN"/>
+          </a:p>
+        </p:txBody>
+      </p:sp>
+      <p:pic>
+        <p:nvPicPr>
+          <p:cNvPr id="7" name="Content Placeholder 6">
+            <a:extLst>
+              <a:ext uri="{FF2B5EF4-FFF2-40B4-BE49-F238E27FC236}">
+                <a16:creationId xmlns:a16="http://schemas.microsoft.com/office/drawing/2014/main" id="{142092B4-461D-7419-E0C8-DEAC925F36CF}"/>
+              </a:ext>
+            </a:extLst>
+          </p:cNvPr>
+          <p:cNvPicPr>
+            <a:picLocks noGrp="1" noChangeAspect="1"/>
+          </p:cNvPicPr>
+          <p:nvPr>
+            <p:ph idx="1"/>
+          </p:nvPr>
+        </p:nvPicPr>
+        <p:blipFill>
+          <a:blip r:embed="rId2">
+            <a:extLst>
+              <a:ext uri="{28A0092B-C50C-407E-A947-70E740481C1C}">
+                <a14:useLocalDpi xmlns:a14="http://schemas.microsoft.com/office/drawing/2010/main" val="0"/>
+              </a:ext>
+            </a:extLst>
+          </a:blip>
+          <a:stretch>
+            <a:fillRect/>
+          </a:stretch>
+        </p:blipFill>
+        <p:spPr bwMode="auto">
+          <a:xfrm>
+            <a:off x="0" y="0"/>
+            <a:ext cx="12191999" cy="6858000"/>
+          </a:xfrm>
+          <a:prstGeom prst="rect">
+            <a:avLst/>
+          </a:prstGeom>
+          <a:noFill/>
+          <a:extLst>
+            <a:ext uri="{909E8E84-426E-40DD-AFC4-6F175D3DCCD1}">
+              <a14:hiddenFill xmlns:a14="http://schemas.microsoft.com/office/drawing/2010/main">
+                <a:solidFill>
+                  <a:srgbClr val="FFFFFF"/>
+                </a:solidFill>
+              </a14:hiddenFill>
+            </a:ext>
+          </a:extLst>
+        </p:spPr>
+      </p:pic>
+    </p:spTree>
+    <p:extLst>
+      <p:ext uri="{BB962C8B-B14F-4D97-AF65-F5344CB8AC3E}">
+        <p14:creationId xmlns:p14="http://schemas.microsoft.com/office/powerpoint/2010/main" val="336565014"/>
+      </p:ext>
+    </p:extLst>
+  </p:cSld>
+  <p:clrMapOvr>
+    <a:masterClrMapping/>
+  </p:clrMapOvr>
+</p:sld>
+</file>
+
+<file path=ppt/slides/slide3.xml><?xml version="1.0" encoding="utf-8"?>
+<p:sld xmlns:a="http://schemas.openxmlformats.org/drawingml/2006/main" xmlns:r="http://schemas.openxmlformats.org/officeDocument/2006/relationships" xmlns:p="http://schemas.openxmlformats.org/presentationml/2006/main">
+  <p:cSld>
+    <p:spTree>
+      <p:nvGrpSpPr>
+        <p:cNvPr id="1" name=""/>
+        <p:cNvGrpSpPr/>
+        <p:nvPr/>
+      </p:nvGrpSpPr>
+      <p:grpSpPr>
+        <a:xfrm>
+          <a:off x="0" y="0"/>
+          <a:ext cx="0" cy="0"/>
+          <a:chOff x="0" y="0"/>
+          <a:chExt cx="0" cy="0"/>
+        </a:xfrm>
+      </p:grpSpPr>
+      <p:sp>
+        <p:nvSpPr>
+          <p:cNvPr id="2" name="Title 1">
+            <a:extLst>
+              <a:ext uri="{FF2B5EF4-FFF2-40B4-BE49-F238E27FC236}">
                 <a16:creationId xmlns:a16="http://schemas.microsoft.com/office/drawing/2014/main" id="{5D4CC64F-386F-3543-EFB9-58DBABEE4C39}"/>
               </a:ext>
             </a:extLst>
@@ -7712,7 +8738,7 @@
 </p:sld>
 </file>
 
-<file path=ppt/slides/slide3.xml><?xml version="1.0" encoding="utf-8"?>
+<file path=ppt/slides/slide4.xml><?xml version="1.0" encoding="utf-8"?>
 <p:sld xmlns:a="http://schemas.openxmlformats.org/drawingml/2006/main" xmlns:r="http://schemas.openxmlformats.org/officeDocument/2006/relationships" xmlns:p="http://schemas.openxmlformats.org/presentationml/2006/main">
   <p:cSld>
     <p:spTree>
@@ -8387,7 +9413,7 @@
 </p:sld>
 </file>
 
-<file path=ppt/slides/slide4.xml><?xml version="1.0" encoding="utf-8"?>
+<file path=ppt/slides/slide5.xml><?xml version="1.0" encoding="utf-8"?>
 <p:sld xmlns:a="http://schemas.openxmlformats.org/drawingml/2006/main" xmlns:r="http://schemas.openxmlformats.org/officeDocument/2006/relationships" xmlns:p="http://schemas.openxmlformats.org/presentationml/2006/main">
   <p:cSld>
     <p:spTree>
@@ -8868,7 +9894,7 @@
 </p:sld>
 </file>
 
-<file path=ppt/slides/slide5.xml><?xml version="1.0" encoding="utf-8"?>
+<file path=ppt/slides/slide6.xml><?xml version="1.0" encoding="utf-8"?>
 <p:sld xmlns:a="http://schemas.openxmlformats.org/drawingml/2006/main" xmlns:r="http://schemas.openxmlformats.org/officeDocument/2006/relationships" xmlns:p="http://schemas.openxmlformats.org/presentationml/2006/main">
   <p:cSld>
     <p:spTree>
@@ -9345,7 +10371,7 @@
 </p:sld>
 </file>
 
-<file path=ppt/slides/slide6.xml><?xml version="1.0" encoding="utf-8"?>
+<file path=ppt/slides/slide7.xml><?xml version="1.0" encoding="utf-8"?>
 <p:sld xmlns:a="http://schemas.openxmlformats.org/drawingml/2006/main" xmlns:r="http://schemas.openxmlformats.org/officeDocument/2006/relationships" xmlns:p="http://schemas.openxmlformats.org/presentationml/2006/main">
   <p:cSld>
     <p:spTree>
@@ -9768,12 +10794,18 @@
 </p:sld>
 </file>
 
-<file path=ppt/slides/slide7.xml><?xml version="1.0" encoding="utf-8"?>
+<file path=ppt/slides/slide8.xml><?xml version="1.0" encoding="utf-8"?>
 <p:sld xmlns:a="http://schemas.openxmlformats.org/drawingml/2006/main" xmlns:r="http://schemas.openxmlformats.org/officeDocument/2006/relationships" xmlns:p="http://schemas.openxmlformats.org/presentationml/2006/main">
   <p:cSld>
     <p:spTree>
       <p:nvGrpSpPr>
-        <p:cNvPr id="1" name=""/>
+        <p:cNvPr id="1" name="">
+          <a:extLst>
+            <a:ext uri="{FF2B5EF4-FFF2-40B4-BE49-F238E27FC236}">
+              <a16:creationId xmlns:a16="http://schemas.microsoft.com/office/drawing/2014/main" id="{6F0A7E63-6ADB-0B1A-0DAE-E575CFD4127C}"/>
+            </a:ext>
+          </a:extLst>
+        </p:cNvPr>
         <p:cNvGrpSpPr/>
         <p:nvPr/>
       </p:nvGrpSpPr>
@@ -9790,7 +10822,7 @@
           <p:cNvPr id="2" name="Title 1">
             <a:extLst>
               <a:ext uri="{FF2B5EF4-FFF2-40B4-BE49-F238E27FC236}">
-                <a16:creationId xmlns:a16="http://schemas.microsoft.com/office/drawing/2014/main" id="{81D0188B-2233-E74A-4751-1978C8796FC9}"/>
+                <a16:creationId xmlns:a16="http://schemas.microsoft.com/office/drawing/2014/main" id="{69EE7532-6C85-89D6-032B-D1731346B34F}"/>
               </a:ext>
             </a:extLst>
           </p:cNvPr>
@@ -9803,14 +10835,15 @@
         </p:nvSpPr>
         <p:spPr>
           <a:xfrm>
-            <a:off x="677334" y="609600"/>
-            <a:ext cx="9750936" cy="1320800"/>
+            <a:off x="851995" y="301376"/>
+            <a:ext cx="8596668" cy="1320800"/>
           </a:xfrm>
         </p:spPr>
         <p:txBody>
           <a:bodyPr/>
           <a:lstStyle/>
           <a:p>
+            <a:pPr algn="ctr"/>
             <a:r>
               <a:rPr lang="en-US" b="1" dirty="0">
                 <a:solidFill>
@@ -9819,7 +10852,7 @@
                 <a:latin typeface="Times New Roman" panose="02020603050405020304" pitchFamily="18" charset="0"/>
                 <a:cs typeface="Times New Roman" panose="02020603050405020304" pitchFamily="18" charset="0"/>
               </a:rPr>
-              <a:t>                           Schema Modelling</a:t>
+              <a:t>                </a:t>
             </a:r>
             <a:endParaRPr lang="en-IN" b="1" dirty="0">
               <a:solidFill>
@@ -9831,287 +10864,142 @@
           </a:p>
         </p:txBody>
       </p:sp>
+      <p:sp>
+        <p:nvSpPr>
+          <p:cNvPr id="4" name="TextBox 3">
+            <a:extLst>
+              <a:ext uri="{FF2B5EF4-FFF2-40B4-BE49-F238E27FC236}">
+                <a16:creationId xmlns:a16="http://schemas.microsoft.com/office/drawing/2014/main" id="{D6457E33-C9CC-0AFE-E699-1F29AD78054C}"/>
+              </a:ext>
+            </a:extLst>
+          </p:cNvPr>
+          <p:cNvSpPr txBox="1"/>
+          <p:nvPr/>
+        </p:nvSpPr>
+        <p:spPr>
+          <a:xfrm>
+            <a:off x="3311634" y="573817"/>
+            <a:ext cx="7222733" cy="523220"/>
+          </a:xfrm>
+          <a:prstGeom prst="rect">
+            <a:avLst/>
+          </a:prstGeom>
+          <a:noFill/>
+        </p:spPr>
+        <p:txBody>
+          <a:bodyPr wrap="square" rtlCol="0">
+            <a:spAutoFit/>
+          </a:bodyPr>
+          <a:lstStyle/>
+          <a:p>
+            <a:r>
+              <a:rPr lang="en-US" sz="2800" b="1" dirty="0">
+                <a:latin typeface="Times New Roman" panose="02020603050405020304" pitchFamily="18" charset="0"/>
+                <a:cs typeface="Times New Roman" panose="02020603050405020304" pitchFamily="18" charset="0"/>
+              </a:rPr>
+              <a:t>FACT AND DIMENSIONS TABLES</a:t>
+            </a:r>
+            <a:endParaRPr lang="en-IN" sz="2800" b="1" dirty="0">
+              <a:latin typeface="Times New Roman" panose="02020603050405020304" pitchFamily="18" charset="0"/>
+              <a:cs typeface="Times New Roman" panose="02020603050405020304" pitchFamily="18" charset="0"/>
+            </a:endParaRPr>
+          </a:p>
+        </p:txBody>
+      </p:sp>
       <p:pic>
         <p:nvPicPr>
-          <p:cNvPr id="7" name="Content Placeholder 6">
+          <p:cNvPr id="26" name="Picture 25">
             <a:extLst>
               <a:ext uri="{FF2B5EF4-FFF2-40B4-BE49-F238E27FC236}">
-                <a16:creationId xmlns:a16="http://schemas.microsoft.com/office/drawing/2014/main" id="{D43F1264-A6C1-DB15-618C-361C30637F88}"/>
+                <a16:creationId xmlns:a16="http://schemas.microsoft.com/office/drawing/2014/main" id="{A3239652-495A-7954-9A6F-CB213A889DD4}"/>
               </a:ext>
             </a:extLst>
           </p:cNvPr>
           <p:cNvPicPr>
-            <a:picLocks noGrp="1" noChangeAspect="1"/>
+            <a:picLocks noChangeAspect="1"/>
           </p:cNvPicPr>
-          <p:nvPr>
-            <p:ph idx="1"/>
-          </p:nvPr>
+          <p:nvPr/>
         </p:nvPicPr>
         <p:blipFill>
-          <a:blip r:embed="rId2">
-            <a:extLst>
-              <a:ext uri="{28A0092B-C50C-407E-A947-70E740481C1C}">
-                <a14:useLocalDpi xmlns:a14="http://schemas.microsoft.com/office/drawing/2010/main" val="0"/>
-              </a:ext>
-            </a:extLst>
-          </a:blip>
+          <a:blip r:embed="rId2"/>
           <a:stretch>
             <a:fillRect/>
           </a:stretch>
         </p:blipFill>
         <p:spPr>
           <a:xfrm>
-            <a:off x="1284270" y="1703703"/>
-            <a:ext cx="8712485" cy="4346789"/>
-          </a:xfrm>
+            <a:off x="397111" y="1277070"/>
+            <a:ext cx="3886742" cy="4341963"/>
+          </a:xfrm>
+          <a:prstGeom prst="rect">
+            <a:avLst/>
+          </a:prstGeom>
+        </p:spPr>
+      </p:pic>
+      <p:pic>
+        <p:nvPicPr>
+          <p:cNvPr id="30" name="Picture 29">
+            <a:extLst>
+              <a:ext uri="{FF2B5EF4-FFF2-40B4-BE49-F238E27FC236}">
+                <a16:creationId xmlns:a16="http://schemas.microsoft.com/office/drawing/2014/main" id="{729D7151-6FBF-6C41-22FE-D6B7F0A910CA}"/>
+              </a:ext>
+            </a:extLst>
+          </p:cNvPr>
+          <p:cNvPicPr>
+            <a:picLocks noChangeAspect="1"/>
+          </p:cNvPicPr>
+          <p:nvPr/>
+        </p:nvPicPr>
+        <p:blipFill>
+          <a:blip r:embed="rId3"/>
+          <a:stretch>
+            <a:fillRect/>
+          </a:stretch>
+        </p:blipFill>
+        <p:spPr>
+          <a:xfrm>
+            <a:off x="4573934" y="1280811"/>
+            <a:ext cx="3334215" cy="4334480"/>
+          </a:xfrm>
+          <a:prstGeom prst="rect">
+            <a:avLst/>
+          </a:prstGeom>
+        </p:spPr>
+      </p:pic>
+      <p:pic>
+        <p:nvPicPr>
+          <p:cNvPr id="32" name="Picture 31">
+            <a:extLst>
+              <a:ext uri="{FF2B5EF4-FFF2-40B4-BE49-F238E27FC236}">
+                <a16:creationId xmlns:a16="http://schemas.microsoft.com/office/drawing/2014/main" id="{EC1E19EA-2FFF-C0AD-784C-899E4147212C}"/>
+              </a:ext>
+            </a:extLst>
+          </p:cNvPr>
+          <p:cNvPicPr>
+            <a:picLocks noChangeAspect="1"/>
+          </p:cNvPicPr>
+          <p:nvPr/>
+        </p:nvPicPr>
+        <p:blipFill>
+          <a:blip r:embed="rId4"/>
+          <a:stretch>
+            <a:fillRect/>
+          </a:stretch>
+        </p:blipFill>
+        <p:spPr>
+          <a:xfrm>
+            <a:off x="8198230" y="1242707"/>
+            <a:ext cx="3686689" cy="4372585"/>
+          </a:xfrm>
+          <a:prstGeom prst="rect">
+            <a:avLst/>
+          </a:prstGeom>
         </p:spPr>
       </p:pic>
     </p:spTree>
     <p:extLst>
       <p:ext uri="{BB962C8B-B14F-4D97-AF65-F5344CB8AC3E}">
-        <p14:creationId xmlns:p14="http://schemas.microsoft.com/office/powerpoint/2010/main" val="815895734"/>
-      </p:ext>
-    </p:extLst>
-  </p:cSld>
-  <p:clrMapOvr>
-    <a:masterClrMapping/>
-  </p:clrMapOvr>
-</p:sld>
-</file>
-
-<file path=ppt/slides/slide8.xml><?xml version="1.0" encoding="utf-8"?>
-<p:sld xmlns:a="http://schemas.openxmlformats.org/drawingml/2006/main" xmlns:r="http://schemas.openxmlformats.org/officeDocument/2006/relationships" xmlns:p="http://schemas.openxmlformats.org/presentationml/2006/main">
-  <p:cSld>
-    <p:spTree>
-      <p:nvGrpSpPr>
-        <p:cNvPr id="1" name=""/>
-        <p:cNvGrpSpPr/>
-        <p:nvPr/>
-      </p:nvGrpSpPr>
-      <p:grpSpPr>
-        <a:xfrm>
-          <a:off x="0" y="0"/>
-          <a:ext cx="0" cy="0"/>
-          <a:chOff x="0" y="0"/>
-          <a:chExt cx="0" cy="0"/>
-        </a:xfrm>
-      </p:grpSpPr>
-      <p:sp>
-        <p:nvSpPr>
-          <p:cNvPr id="2" name="Title 1">
-            <a:extLst>
-              <a:ext uri="{FF2B5EF4-FFF2-40B4-BE49-F238E27FC236}">
-                <a16:creationId xmlns:a16="http://schemas.microsoft.com/office/drawing/2014/main" id="{A31C3E90-41B9-0FD2-63B3-D34B0F9CCE51}"/>
-              </a:ext>
-            </a:extLst>
-          </p:cNvPr>
-          <p:cNvSpPr>
-            <a:spLocks noGrp="1"/>
-          </p:cNvSpPr>
-          <p:nvPr>
-            <p:ph type="title"/>
-          </p:nvPr>
-        </p:nvSpPr>
-        <p:spPr>
-          <a:xfrm>
-            <a:off x="851995" y="301376"/>
-            <a:ext cx="8596668" cy="1320800"/>
-          </a:xfrm>
-        </p:spPr>
-        <p:txBody>
-          <a:bodyPr/>
-          <a:lstStyle/>
-          <a:p>
-            <a:pPr algn="ctr"/>
-            <a:r>
-              <a:rPr lang="en-US" b="1" dirty="0">
-                <a:solidFill>
-                  <a:schemeClr val="tx1"/>
-                </a:solidFill>
-                <a:latin typeface="Times New Roman" panose="02020603050405020304" pitchFamily="18" charset="0"/>
-                <a:cs typeface="Times New Roman" panose="02020603050405020304" pitchFamily="18" charset="0"/>
-              </a:rPr>
-              <a:t>                Key Performance Indicators</a:t>
-            </a:r>
-            <a:endParaRPr lang="en-IN" b="1" dirty="0">
-              <a:solidFill>
-                <a:schemeClr val="tx1"/>
-              </a:solidFill>
-              <a:latin typeface="Times New Roman" panose="02020603050405020304" pitchFamily="18" charset="0"/>
-              <a:cs typeface="Times New Roman" panose="02020603050405020304" pitchFamily="18" charset="0"/>
-            </a:endParaRPr>
-          </a:p>
-        </p:txBody>
-      </p:sp>
-      <p:sp>
-        <p:nvSpPr>
-          <p:cNvPr id="3" name="Content Placeholder 2">
-            <a:extLst>
-              <a:ext uri="{FF2B5EF4-FFF2-40B4-BE49-F238E27FC236}">
-                <a16:creationId xmlns:a16="http://schemas.microsoft.com/office/drawing/2014/main" id="{C7372B3C-1407-FB62-0BC0-C2F0B0D6BF5E}"/>
-              </a:ext>
-            </a:extLst>
-          </p:cNvPr>
-          <p:cNvSpPr>
-            <a:spLocks noGrp="1"/>
-          </p:cNvSpPr>
-          <p:nvPr>
-            <p:ph idx="1"/>
-          </p:nvPr>
-        </p:nvSpPr>
-        <p:spPr>
-          <a:xfrm>
-            <a:off x="1089061" y="1369478"/>
-            <a:ext cx="10531011" cy="4743646"/>
-          </a:xfrm>
-        </p:spPr>
-        <p:txBody>
-          <a:bodyPr>
-            <a:normAutofit/>
-          </a:bodyPr>
-          <a:lstStyle/>
-          <a:p>
-            <a:pPr marL="0" indent="0">
-              <a:buNone/>
-            </a:pPr>
-            <a:r>
-              <a:rPr lang="en-US" sz="3000" b="1" dirty="0">
-                <a:latin typeface="Times New Roman" panose="02020603050405020304" pitchFamily="18" charset="0"/>
-                <a:cs typeface="Times New Roman" panose="02020603050405020304" pitchFamily="18" charset="0"/>
-              </a:rPr>
-              <a:t>Positive KPIs</a:t>
-            </a:r>
-          </a:p>
-          <a:p>
-            <a:pPr>
-              <a:buClr>
-                <a:schemeClr val="tx1">
-                  <a:lumMod val="95000"/>
-                  <a:lumOff val="5000"/>
-                </a:schemeClr>
-              </a:buClr>
-              <a:buFont typeface="Wingdings" panose="05000000000000000000" pitchFamily="2" charset="2"/>
-              <a:buChar char="Ø"/>
-            </a:pPr>
-            <a:r>
-              <a:rPr lang="en-IN" sz="2600" b="1" dirty="0">
-                <a:latin typeface="Times New Roman" panose="02020603050405020304" pitchFamily="18" charset="0"/>
-                <a:cs typeface="Times New Roman" panose="02020603050405020304" pitchFamily="18" charset="0"/>
-              </a:rPr>
-              <a:t>Total Revenue</a:t>
-            </a:r>
-          </a:p>
-          <a:p>
-            <a:pPr>
-              <a:buClr>
-                <a:schemeClr val="tx1">
-                  <a:lumMod val="95000"/>
-                  <a:lumOff val="5000"/>
-                </a:schemeClr>
-              </a:buClr>
-              <a:buFont typeface="Wingdings" panose="05000000000000000000" pitchFamily="2" charset="2"/>
-              <a:buChar char="Ø"/>
-            </a:pPr>
-            <a:r>
-              <a:rPr lang="en-IN" sz="2600" b="1" dirty="0">
-                <a:latin typeface="Times New Roman" panose="02020603050405020304" pitchFamily="18" charset="0"/>
-                <a:cs typeface="Times New Roman" panose="02020603050405020304" pitchFamily="18" charset="0"/>
-              </a:rPr>
-              <a:t>Branch-wise revenue share</a:t>
-            </a:r>
-          </a:p>
-          <a:p>
-            <a:pPr>
-              <a:buClr>
-                <a:schemeClr val="tx1">
-                  <a:lumMod val="95000"/>
-                  <a:lumOff val="5000"/>
-                </a:schemeClr>
-              </a:buClr>
-              <a:buFont typeface="Wingdings" panose="05000000000000000000" pitchFamily="2" charset="2"/>
-              <a:buChar char="Ø"/>
-            </a:pPr>
-            <a:r>
-              <a:rPr lang="en-IN" sz="2600" b="1" dirty="0">
-                <a:latin typeface="Times New Roman" panose="02020603050405020304" pitchFamily="18" charset="0"/>
-                <a:cs typeface="Times New Roman" panose="02020603050405020304" pitchFamily="18" charset="0"/>
-              </a:rPr>
-              <a:t>Employee Sales per Head</a:t>
-            </a:r>
-          </a:p>
-          <a:p>
-            <a:pPr marL="0" indent="0">
-              <a:buNone/>
-            </a:pPr>
-            <a:endParaRPr lang="en-IN" b="1" dirty="0">
-              <a:latin typeface="Times New Roman" panose="02020603050405020304" pitchFamily="18" charset="0"/>
-              <a:cs typeface="Times New Roman" panose="02020603050405020304" pitchFamily="18" charset="0"/>
-            </a:endParaRPr>
-          </a:p>
-          <a:p>
-            <a:pPr marL="0" indent="0">
-              <a:buNone/>
-            </a:pPr>
-            <a:r>
-              <a:rPr lang="en-IN" sz="3000" b="1" dirty="0">
-                <a:latin typeface="Times New Roman" panose="02020603050405020304" pitchFamily="18" charset="0"/>
-                <a:cs typeface="Times New Roman" panose="02020603050405020304" pitchFamily="18" charset="0"/>
-              </a:rPr>
-              <a:t>Negative KPIs</a:t>
-            </a:r>
-          </a:p>
-          <a:p>
-            <a:pPr>
-              <a:buClrTx/>
-              <a:buFont typeface="Wingdings" panose="05000000000000000000" pitchFamily="2" charset="2"/>
-              <a:buChar char="Ø"/>
-            </a:pPr>
-            <a:r>
-              <a:rPr lang="en-IN" sz="2600" b="1" dirty="0">
-                <a:latin typeface="Times New Roman" panose="02020603050405020304" pitchFamily="18" charset="0"/>
-                <a:cs typeface="Times New Roman" panose="02020603050405020304" pitchFamily="18" charset="0"/>
-              </a:rPr>
-              <a:t>Stockouts</a:t>
-            </a:r>
-          </a:p>
-          <a:p>
-            <a:pPr>
-              <a:buClrTx/>
-              <a:buFont typeface="Wingdings" panose="05000000000000000000" pitchFamily="2" charset="2"/>
-              <a:buChar char="Ø"/>
-            </a:pPr>
-            <a:r>
-              <a:rPr lang="en-IN" sz="2600" b="1" dirty="0">
-                <a:latin typeface="Times New Roman" panose="02020603050405020304" pitchFamily="18" charset="0"/>
-                <a:cs typeface="Times New Roman" panose="02020603050405020304" pitchFamily="18" charset="0"/>
-              </a:rPr>
-              <a:t>Discount Leakage</a:t>
-            </a:r>
-          </a:p>
-          <a:p>
-            <a:pPr>
-              <a:buClrTx/>
-              <a:buFont typeface="Wingdings" panose="05000000000000000000" pitchFamily="2" charset="2"/>
-              <a:buChar char="Ø"/>
-            </a:pPr>
-            <a:r>
-              <a:rPr lang="en-IN" sz="2600" b="1" dirty="0">
-                <a:latin typeface="Times New Roman" panose="02020603050405020304" pitchFamily="18" charset="0"/>
-                <a:cs typeface="Times New Roman" panose="02020603050405020304" pitchFamily="18" charset="0"/>
-              </a:rPr>
-              <a:t>Customer Churn</a:t>
-            </a:r>
-            <a:endParaRPr lang="en-IN" sz="2600" dirty="0">
-              <a:latin typeface="Times New Roman" panose="02020603050405020304" pitchFamily="18" charset="0"/>
-              <a:cs typeface="Times New Roman" panose="02020603050405020304" pitchFamily="18" charset="0"/>
-            </a:endParaRPr>
-          </a:p>
-        </p:txBody>
-      </p:sp>
-    </p:spTree>
-    <p:extLst>
-      <p:ext uri="{BB962C8B-B14F-4D97-AF65-F5344CB8AC3E}">
-        <p14:creationId xmlns:p14="http://schemas.microsoft.com/office/powerpoint/2010/main" val="2413077751"/>
+        <p14:creationId xmlns:p14="http://schemas.microsoft.com/office/powerpoint/2010/main" val="120475811"/>
       </p:ext>
     </p:extLst>
   </p:cSld>
@@ -10129,7 +11017,7 @@
         <p:cNvPr id="1" name="">
           <a:extLst>
             <a:ext uri="{FF2B5EF4-FFF2-40B4-BE49-F238E27FC236}">
-              <a16:creationId xmlns:a16="http://schemas.microsoft.com/office/drawing/2014/main" id="{CD6D0018-499B-5431-D927-CADADA02EA4C}"/>
+              <a16:creationId xmlns:a16="http://schemas.microsoft.com/office/drawing/2014/main" id="{C8FD1616-051E-C0F3-A272-E2F1A02D4CD7}"/>
             </a:ext>
           </a:extLst>
         </p:cNvPr>
@@ -10149,7 +11037,7 @@
           <p:cNvPr id="2" name="Title 1">
             <a:extLst>
               <a:ext uri="{FF2B5EF4-FFF2-40B4-BE49-F238E27FC236}">
-                <a16:creationId xmlns:a16="http://schemas.microsoft.com/office/drawing/2014/main" id="{22D36BC8-B096-74EB-C4B5-C01FF5B01823}"/>
+                <a16:creationId xmlns:a16="http://schemas.microsoft.com/office/drawing/2014/main" id="{78DA5134-7220-7722-90B0-C49447C0B740}"/>
               </a:ext>
             </a:extLst>
           </p:cNvPr>
@@ -10160,12 +11048,17 @@
             <p:ph type="title"/>
           </p:nvPr>
         </p:nvSpPr>
-        <p:spPr/>
+        <p:spPr>
+          <a:xfrm>
+            <a:off x="851995" y="301376"/>
+            <a:ext cx="8596668" cy="1320800"/>
+          </a:xfrm>
+        </p:spPr>
         <p:txBody>
           <a:bodyPr/>
           <a:lstStyle/>
           <a:p>
-            <a:pPr algn="just"/>
+            <a:pPr algn="ctr"/>
             <a:r>
               <a:rPr lang="en-US" b="1" dirty="0">
                 <a:solidFill>
@@ -10174,7 +11067,7 @@
                 <a:latin typeface="Times New Roman" panose="02020603050405020304" pitchFamily="18" charset="0"/>
                 <a:cs typeface="Times New Roman" panose="02020603050405020304" pitchFamily="18" charset="0"/>
               </a:rPr>
-              <a:t>                                 Dataset</a:t>
+              <a:t>                </a:t>
             </a:r>
             <a:endParaRPr lang="en-IN" b="1" dirty="0">
               <a:solidFill>
@@ -10188,10 +11081,10 @@
       </p:sp>
       <p:sp>
         <p:nvSpPr>
-          <p:cNvPr id="6" name="TextBox 5">
+          <p:cNvPr id="4" name="TextBox 3">
             <a:extLst>
               <a:ext uri="{FF2B5EF4-FFF2-40B4-BE49-F238E27FC236}">
-                <a16:creationId xmlns:a16="http://schemas.microsoft.com/office/drawing/2014/main" id="{F928174C-08FE-ED97-440F-132E446C8BFC}"/>
+                <a16:creationId xmlns:a16="http://schemas.microsoft.com/office/drawing/2014/main" id="{6C15DAF0-E0C2-579E-17A8-2760CFF570CD}"/>
               </a:ext>
             </a:extLst>
           </p:cNvPr>
@@ -10200,8 +11093,8 @@
         </p:nvSpPr>
         <p:spPr>
           <a:xfrm>
-            <a:off x="3386667" y="1464733"/>
-            <a:ext cx="3716866" cy="400110"/>
+            <a:off x="3524422" y="566243"/>
+            <a:ext cx="7222733" cy="523220"/>
           </a:xfrm>
           <a:prstGeom prst="rect">
             <a:avLst/>
@@ -10215,20 +11108,13 @@
           <a:lstStyle/>
           <a:p>
             <a:r>
-              <a:rPr lang="en-US" sz="2000" dirty="0">
+              <a:rPr lang="en-US" sz="2800" b="1" dirty="0">
                 <a:latin typeface="Times New Roman" panose="02020603050405020304" pitchFamily="18" charset="0"/>
                 <a:cs typeface="Times New Roman" panose="02020603050405020304" pitchFamily="18" charset="0"/>
               </a:rPr>
-              <a:t>                 </a:t>
-            </a:r>
-            <a:r>
-              <a:rPr lang="en-US" sz="2000" dirty="0" err="1">
-                <a:latin typeface="Times New Roman" panose="02020603050405020304" pitchFamily="18" charset="0"/>
-                <a:cs typeface="Times New Roman" panose="02020603050405020304" pitchFamily="18" charset="0"/>
-              </a:rPr>
-              <a:t>Fact_Sales</a:t>
-            </a:r>
-            <a:endParaRPr lang="en-IN" sz="2000" dirty="0">
+              <a:t>DIMENSIONS TABLES</a:t>
+            </a:r>
+            <a:endParaRPr lang="en-IN" sz="2800" b="1" dirty="0">
               <a:latin typeface="Times New Roman" panose="02020603050405020304" pitchFamily="18" charset="0"/>
               <a:cs typeface="Times New Roman" panose="02020603050405020304" pitchFamily="18" charset="0"/>
             </a:endParaRPr>
@@ -10240,7 +11126,7 @@
           <p:cNvPr id="9" name="Picture 8">
             <a:extLst>
               <a:ext uri="{FF2B5EF4-FFF2-40B4-BE49-F238E27FC236}">
-                <a16:creationId xmlns:a16="http://schemas.microsoft.com/office/drawing/2014/main" id="{1B7C9183-CC52-7A87-9A28-B05217F0A0F5}"/>
+                <a16:creationId xmlns:a16="http://schemas.microsoft.com/office/drawing/2014/main" id="{DCEA7DED-1915-46FD-8476-D5044086DFD1}"/>
               </a:ext>
             </a:extLst>
           </p:cNvPr>
@@ -10257,8 +11143,98 @@
         </p:blipFill>
         <p:spPr>
           <a:xfrm>
-            <a:off x="1058237" y="2234063"/>
-            <a:ext cx="9623461" cy="3499482"/>
+            <a:off x="9125009" y="1369477"/>
+            <a:ext cx="2494764" cy="3985101"/>
+          </a:xfrm>
+          <a:prstGeom prst="rect">
+            <a:avLst/>
+          </a:prstGeom>
+        </p:spPr>
+      </p:pic>
+      <p:pic>
+        <p:nvPicPr>
+          <p:cNvPr id="17" name="Picture 16">
+            <a:extLst>
+              <a:ext uri="{FF2B5EF4-FFF2-40B4-BE49-F238E27FC236}">
+                <a16:creationId xmlns:a16="http://schemas.microsoft.com/office/drawing/2014/main" id="{8D960025-F1C1-4C1A-8AF8-1AAA4728C5B3}"/>
+              </a:ext>
+            </a:extLst>
+          </p:cNvPr>
+          <p:cNvPicPr>
+            <a:picLocks noChangeAspect="1"/>
+          </p:cNvPicPr>
+          <p:nvPr/>
+        </p:nvPicPr>
+        <p:blipFill>
+          <a:blip r:embed="rId3"/>
+          <a:stretch>
+            <a:fillRect/>
+          </a:stretch>
+        </p:blipFill>
+        <p:spPr>
+          <a:xfrm>
+            <a:off x="3524422" y="1361904"/>
+            <a:ext cx="2494764" cy="3992673"/>
+          </a:xfrm>
+          <a:prstGeom prst="rect">
+            <a:avLst/>
+          </a:prstGeom>
+        </p:spPr>
+      </p:pic>
+      <p:pic>
+        <p:nvPicPr>
+          <p:cNvPr id="21" name="Picture 20">
+            <a:extLst>
+              <a:ext uri="{FF2B5EF4-FFF2-40B4-BE49-F238E27FC236}">
+                <a16:creationId xmlns:a16="http://schemas.microsoft.com/office/drawing/2014/main" id="{8C89D79C-06C9-762F-BF2B-FE752EEDB138}"/>
+              </a:ext>
+            </a:extLst>
+          </p:cNvPr>
+          <p:cNvPicPr>
+            <a:picLocks noChangeAspect="1"/>
+          </p:cNvPicPr>
+          <p:nvPr/>
+        </p:nvPicPr>
+        <p:blipFill>
+          <a:blip r:embed="rId4"/>
+          <a:stretch>
+            <a:fillRect/>
+          </a:stretch>
+        </p:blipFill>
+        <p:spPr>
+          <a:xfrm>
+            <a:off x="6452583" y="1369478"/>
+            <a:ext cx="2239029" cy="3985102"/>
+          </a:xfrm>
+          <a:prstGeom prst="rect">
+            <a:avLst/>
+          </a:prstGeom>
+        </p:spPr>
+      </p:pic>
+      <p:pic>
+        <p:nvPicPr>
+          <p:cNvPr id="29" name="Picture 28">
+            <a:extLst>
+              <a:ext uri="{FF2B5EF4-FFF2-40B4-BE49-F238E27FC236}">
+                <a16:creationId xmlns:a16="http://schemas.microsoft.com/office/drawing/2014/main" id="{8AEC1759-3472-BE62-A2D1-0834F3EBD829}"/>
+              </a:ext>
+            </a:extLst>
+          </p:cNvPr>
+          <p:cNvPicPr>
+            <a:picLocks noChangeAspect="1"/>
+          </p:cNvPicPr>
+          <p:nvPr/>
+        </p:nvPicPr>
+        <p:blipFill>
+          <a:blip r:embed="rId5"/>
+          <a:stretch>
+            <a:fillRect/>
+          </a:stretch>
+        </p:blipFill>
+        <p:spPr>
+          <a:xfrm>
+            <a:off x="173254" y="1411085"/>
+            <a:ext cx="2839453" cy="3943492"/>
           </a:xfrm>
           <a:prstGeom prst="rect">
             <a:avLst/>
@@ -10268,7 +11244,7 @@
     </p:spTree>
     <p:extLst>
       <p:ext uri="{BB962C8B-B14F-4D97-AF65-F5344CB8AC3E}">
-        <p14:creationId xmlns:p14="http://schemas.microsoft.com/office/powerpoint/2010/main" val="2544861665"/>
+        <p14:creationId xmlns:p14="http://schemas.microsoft.com/office/powerpoint/2010/main" val="59021150"/>
       </p:ext>
     </p:extLst>
   </p:cSld>
